--- a/Kubernetes/Trainer/K8s_TrackB_Trainer_Part1.pptx
+++ b/Kubernetes/Trainer/K8s_TrackB_Trainer_Part1.pptx
@@ -4,6 +4,9 @@
   <p:sldMasterIdLst>
     <p:sldMasterId id="2147483648" r:id="rId1"/>
   </p:sldMasterIdLst>
+  <p:notesMasterIdLst>
+    <p:notesMasterId r:id="rId14"/>
+  </p:notesMasterIdLst>
   <p:sldIdLst>
     <p:sldId id="256" r:id="rId2"/>
     <p:sldId id="257" r:id="rId3"/>
@@ -18,10 +21,7 @@
     <p:sldId id="266" r:id="rId12"/>
     <p:sldId id="267" r:id="rId13"/>
   </p:sldIdLst>
-  <p:notesMasterIdLst>
-    <p:notesMasterId r:id="rId14"/>
-  </p:notesMasterIdLst>
-  <p:sldSz cx="9144000" cy="5143500"/>
+  <p:sldSz cx="9144000" cy="5143500" type="screen16x9"/>
   <p:notesSz cx="5143500" cy="9144000"/>
   <p:defaultTextStyle>
     <a:lvl1pPr marL="0" algn="l" defTabSz="914400" rtl="0" eaLnBrk="1" latinLnBrk="0" hangingPunct="1">
@@ -115,7 +115,20 @@
       </a:defRPr>
     </a:lvl9pPr>
   </p:defaultTextStyle>
+  <p:extLst>
+    <p:ext uri="{EFAFB233-063F-42B5-8137-9DF3F51BA10A}">
+      <p15:sldGuideLst xmlns:p15="http://schemas.microsoft.com/office/powerpoint/2012/main"/>
+    </p:ext>
+  </p:extLst>
 </p:presentation>
+</file>
+
+<file path=ppt/revisionInfo.xml><?xml version="1.0" encoding="utf-8"?>
+<p1510:revInfo xmlns:a="http://schemas.openxmlformats.org/drawingml/2006/main" xmlns:r="http://schemas.openxmlformats.org/officeDocument/2006/relationships" xmlns:p1510="http://schemas.microsoft.com/office/powerpoint/2015/10/main">
+  <p1510:revLst>
+    <p1510:client id="{F05BA82E-36A2-77B2-7D53-9F8CD40A9122}" v="1" dt="2026-07-14T17:50:55.575"/>
+  </p1510:revLst>
+</p1510:revInfo>
 </file>
 
 <file path=ppt/notesMasters/notesMaster1.xml><?xml version="1.0" encoding="utf-8"?>
@@ -153,7 +166,7 @@
         <p:spPr>
           <a:xfrm>
             <a:off x="0" y="0"/>
-            <a:ext cx="2971800" cy="458788"/>
+            <a:ext cx="2228850" cy="458788"/>
           </a:xfrm>
           <a:prstGeom prst="rect">
             <a:avLst/>
@@ -167,7 +180,7 @@
             </a:lvl1pPr>
           </a:lstStyle>
           <a:p>
-            <a:endParaRPr lang="en-US"/>
+            <a:endParaRPr lang="en-GB"/>
           </a:p>
         </p:txBody>
       </p:sp>
@@ -183,8 +196,8 @@
         </p:nvSpPr>
         <p:spPr>
           <a:xfrm>
-            <a:off x="3884613" y="0"/>
-            <a:ext cx="2971800" cy="458788"/>
+            <a:off x="2913063" y="0"/>
+            <a:ext cx="2228850" cy="458788"/>
           </a:xfrm>
           <a:prstGeom prst="rect">
             <a:avLst/>
@@ -198,11 +211,10 @@
             </a:lvl1pPr>
           </a:lstStyle>
           <a:p>
-            <a:fld id="{5282F153-3F37-0F45-9E97-73ACFA13230C}" type="datetimeFigureOut">
-              <a:rPr lang="en-US"/>
-              <a:t>7/23/19</a:t>
+            <a:fld id="{5ED8F64D-0B27-434E-ABBE-7F94B4AA3C83}" type="datetimeFigureOut">
+              <a:t>7/14/2026</a:t>
             </a:fld>
-            <a:endParaRPr lang="en-US"/>
+            <a:endParaRPr lang="en-GB"/>
           </a:p>
         </p:txBody>
       </p:sp>
@@ -218,7 +230,7 @@
         </p:nvSpPr>
         <p:spPr>
           <a:xfrm>
-            <a:off x="685800" y="1143000"/>
+            <a:off x="-171450" y="1143000"/>
             <a:ext cx="5486400" cy="3086100"/>
           </a:xfrm>
           <a:prstGeom prst="rect">
@@ -235,7 +247,7 @@
           <a:bodyPr vert="horz" lIns="91440" tIns="45720" rIns="91440" bIns="45720" rtlCol="0" anchor="ctr"/>
           <a:lstStyle/>
           <a:p>
-            <a:endParaRPr lang="en-US"/>
+            <a:endParaRPr lang="en-GB"/>
           </a:p>
         </p:txBody>
       </p:sp>
@@ -251,8 +263,8 @@
         </p:nvSpPr>
         <p:spPr>
           <a:xfrm>
-            <a:off x="685800" y="4400550"/>
-            <a:ext cx="5486400" cy="3600450"/>
+            <a:off x="514350" y="4400550"/>
+            <a:ext cx="4114800" cy="3600450"/>
           </a:xfrm>
           <a:prstGeom prst="rect">
             <a:avLst/>
@@ -264,35 +276,35 @@
           <a:p>
             <a:pPr lvl="0"/>
             <a:r>
-              <a:rPr lang="en-US"/>
+              <a:rPr lang="en-GB"/>
               <a:t>Click to edit Master text styles</a:t>
             </a:r>
           </a:p>
           <a:p>
             <a:pPr lvl="1"/>
             <a:r>
-              <a:rPr lang="en-US"/>
+              <a:rPr lang="en-GB"/>
               <a:t>Second level</a:t>
             </a:r>
           </a:p>
           <a:p>
             <a:pPr lvl="2"/>
             <a:r>
-              <a:rPr lang="en-US"/>
+              <a:rPr lang="en-GB"/>
               <a:t>Third level</a:t>
             </a:r>
           </a:p>
           <a:p>
             <a:pPr lvl="3"/>
             <a:r>
-              <a:rPr lang="en-US"/>
+              <a:rPr lang="en-GB"/>
               <a:t>Fourth level</a:t>
             </a:r>
           </a:p>
           <a:p>
             <a:pPr lvl="4"/>
             <a:r>
-              <a:rPr lang="en-US"/>
+              <a:rPr lang="en-GB"/>
               <a:t>Fifth level</a:t>
             </a:r>
           </a:p>
@@ -311,7 +323,7 @@
         <p:spPr>
           <a:xfrm>
             <a:off x="0" y="8685213"/>
-            <a:ext cx="2971800" cy="458787"/>
+            <a:ext cx="2228850" cy="458787"/>
           </a:xfrm>
           <a:prstGeom prst="rect">
             <a:avLst/>
@@ -325,7 +337,7 @@
             </a:lvl1pPr>
           </a:lstStyle>
           <a:p>
-            <a:endParaRPr lang="en-US"/>
+            <a:endParaRPr lang="en-GB"/>
           </a:p>
         </p:txBody>
       </p:sp>
@@ -341,8 +353,8 @@
         </p:nvSpPr>
         <p:spPr>
           <a:xfrm>
-            <a:off x="3884613" y="8685213"/>
-            <a:ext cx="2971800" cy="458787"/>
+            <a:off x="2913063" y="8685213"/>
+            <a:ext cx="2228850" cy="458787"/>
           </a:xfrm>
           <a:prstGeom prst="rect">
             <a:avLst/>
@@ -356,18 +368,17 @@
             </a:lvl1pPr>
           </a:lstStyle>
           <a:p>
-            <a:fld id="{CE5E9CC1-C706-0F49-92D6-E571CC5EEA8F}" type="slidenum">
-              <a:rPr lang="en-US"/>
+            <a:fld id="{AEE8CD4E-F81E-4793-8F53-1224803025CF}" type="slidenum">
               <a:t>‹#›</a:t>
             </a:fld>
-            <a:endParaRPr lang="en-US"/>
+            <a:endParaRPr lang="en-GB"/>
           </a:p>
         </p:txBody>
       </p:sp>
     </p:spTree>
     <p:extLst>
       <p:ext uri="{BB962C8B-B14F-4D97-AF65-F5344CB8AC3E}">
-        <p14:creationId xmlns:p14="http://schemas.microsoft.com/office/powerpoint/2010/main" val="1024086991"/>
+        <p14:creationId xmlns:p14="http://schemas.microsoft.com/office/powerpoint/2010/main" val="3383482485"/>
       </p:ext>
     </p:extLst>
   </p:cSld>
@@ -519,7 +530,6 @@
 - Pods, Deployments, Services, kubectl basics
 This track adds: Advanced architecture, Resource Management, ConfigMaps, Namespaces (Day 1) and Secrets, RBAC, Helm, Monitoring, Troubleshooting (Day 2).</a:t>
             </a:r>
-            <a:endParaRPr lang="en-US" dirty="0"/>
           </a:p>
         </p:txBody>
       </p:sp>
@@ -620,7 +630,6 @@
 Resource quotas per namespace (mention, don't go deep unless time):
 kubectl create quota dev-quota --hard=pods=20,cpu=4,memory=8Gi -n dev</a:t>
             </a:r>
-            <a:endParaRPr lang="en-US" dirty="0"/>
           </a:p>
         </p:txBody>
       </p:sp>
@@ -716,7 +725,6 @@
 # Will fail with: exceeded quota
 This is a powerful demo — shows the quota is actively enforced, not just advisory.</a:t>
             </a:r>
-            <a:endParaRPr lang="en-US" dirty="0"/>
           </a:p>
         </p:txBody>
       </p:sp>
@@ -805,7 +813,6 @@
               <a:t>TIMING: 11:05 – 11:15  (10 min)
 BP 03 is critical and leads directly into Day 2 Secrets section. Emphasise: 'If I can kubectl describe configmap and see your database password in plain text, that is a security incident waiting to happen. We solve this tomorrow with Secrets.'</a:t>
             </a:r>
-            <a:endParaRPr lang="en-US" dirty="0"/>
           </a:p>
         </p:txBody>
       </p:sp>
@@ -897,7 +904,6 @@
 Have a broken deployment ready for the troubleshooting section:
 kubectl create deployment broken --image=nginx:doesnotexist -n dev</a:t>
             </a:r>
-            <a:endParaRPr lang="en-US" dirty="0"/>
           </a:p>
         </p:txBody>
       </p:sp>
@@ -986,7 +992,6 @@
               <a:t>TIMING: 09:00 – 09:10
 Opening question: 'Yesterday you deployed a container and scaled it. Today we go deeper — how do you manage configuration without rebuilding images? How do you control who can access what? How do you package a complex app for reuse? These are production-level questions.'</a:t>
             </a:r>
-            <a:endParaRPr lang="en-US" dirty="0"/>
           </a:p>
         </p:txBody>
       </p:sp>
@@ -1075,7 +1080,6 @@
               <a:t>TIMING: 09:10
 Say: 'In Track A you learned what architecture looks like. Now we go one level deeper — how does Kubernetes decide where to place a Pod? How does it know when a Pod is healthy? How do you prevent one app from starving another of resources?'</a:t>
             </a:r>
-            <a:endParaRPr lang="en-US" dirty="0"/>
           </a:p>
         </p:txBody>
       </p:sp>
@@ -1169,7 +1173,6 @@
 OOMKilled demo: set memory limit to 10Mi on a node.js app. It will crash immediately with OOMKilled. kubectl describe pod shows the exit reason.
 Best practice: ALWAYS set requests and limits in production. Without them, a single misbehaving Pod can consume all node resources and evict every other Pod on that node.</a:t>
             </a:r>
-            <a:endParaRPr lang="en-US" dirty="0"/>
           </a:p>
         </p:txBody>
       </p:sp>
@@ -1265,7 +1268,6 @@
 kubectl get events   # shows probe failures if misconfigured
 Common mistake: initialDelaySeconds too short. App crashes on startup because liveness probe fires before app is ready. Solution: set initialDelaySeconds to longer than app startup time.</a:t>
             </a:r>
-            <a:endParaRPr lang="en-US" dirty="0"/>
           </a:p>
         </p:txBody>
       </p:sp>
@@ -1354,7 +1356,6 @@
               <a:t>TIMING: 09:44
 Say: 'Hard question: if you have the same app running in dev, staging and production, how do you handle different database URLs, API keys, and feature flags? Rebuilding a Docker image for each environment is wrong. ConfigMaps solve this — configuration lives outside the container and is injected at runtime.'</a:t>
             </a:r>
-            <a:endParaRPr lang="en-US" dirty="0"/>
           </a:p>
         </p:txBody>
       </p:sp>
@@ -1452,7 +1453,6 @@
 Key limitation: ConfigMaps are NOT for secrets. Database passwords, API keys, tokens → use Secrets (covered in Track B Day 2).
 Volume mount use case: when your app reads a config file (like nginx.conf or app.properties). The whole ConfigMap is mounted as a directory where each key becomes a file.</a:t>
             </a:r>
-            <a:endParaRPr lang="en-US" dirty="0"/>
           </a:p>
         </p:txBody>
       </p:sp>
@@ -1541,7 +1541,6 @@
               <a:t>TIMING: 10:35 (after break)
 Say: 'So far everything has lived in the default namespace. In real organisations, you have dev, staging and production all running on the same cluster. Namespaces let you separate them completely — with independent access controls, resource quotas and network policies.'</a:t>
             </a:r>
-            <a:endParaRPr lang="en-US" dirty="0"/>
           </a:p>
         </p:txBody>
       </p:sp>
@@ -1614,6 +1613,11 @@
 <file path=ppt/slideMasters/slideMaster1.xml><?xml version="1.0" encoding="utf-8"?>
 <p:sldMaster xmlns:a="http://schemas.openxmlformats.org/drawingml/2006/main" xmlns:r="http://schemas.openxmlformats.org/officeDocument/2006/relationships" xmlns:p="http://schemas.openxmlformats.org/presentationml/2006/main">
   <p:cSld>
+    <p:bg>
+      <p:bgRef idx="1001">
+        <a:schemeClr val="bg1"/>
+      </p:bgRef>
+    </p:bg>
     <p:spTree>
       <p:nvGrpSpPr>
         <p:cNvPr id="1" name=""/>
@@ -1896,6 +1900,7 @@
         <a:solidFill>
           <a:srgbClr val="7C2D12"/>
         </a:solidFill>
+        <a:effectLst/>
       </p:bgPr>
     </p:bg>
     <p:spTree>
@@ -1939,35 +1944,6 @@
       </p:sp>
       <p:sp>
         <p:nvSpPr>
-          <p:cNvPr id="3" name="Shape 1"/>
-          <p:cNvSpPr/>
-          <p:nvPr/>
-        </p:nvSpPr>
-        <p:spPr>
-          <a:xfrm>
-            <a:off x="6583680" y="-1097280"/>
-            <a:ext cx="4114800" cy="4114800"/>
-          </a:xfrm>
-          <a:prstGeom prst="ellipse">
-            <a:avLst/>
-          </a:prstGeom>
-          <a:solidFill>
-            <a:srgbClr val="EF4444">
-              <a:alpha val="12000"/>
-            </a:srgbClr>
-          </a:solidFill>
-          <a:ln w="12700">
-            <a:solidFill>
-              <a:srgbClr val="EF4444">
-                <a:alpha val="22000"/>
-              </a:srgbClr>
-            </a:solidFill>
-            <a:prstDash val="solid"/>
-          </a:ln>
-        </p:spPr>
-      </p:sp>
-      <p:sp>
-        <p:nvSpPr>
           <p:cNvPr id="4" name="Text 2"/>
           <p:cNvSpPr/>
           <p:nvPr/>
@@ -1987,7 +1963,7 @@
           <a:bodyPr wrap="square" lIns="0" tIns="0" rIns="0" bIns="0" rtlCol="0" anchor="ctr"/>
           <a:lstStyle/>
           <a:p>
-            <a:pPr indent="0" marL="0">
+            <a:pPr marL="0" indent="0">
               <a:buNone/>
             </a:pPr>
             <a:r>
@@ -2026,7 +2002,7 @@
           <a:bodyPr wrap="square" lIns="0" tIns="0" rIns="0" bIns="0" rtlCol="0" anchor="ctr"/>
           <a:lstStyle/>
           <a:p>
-            <a:pPr indent="0" marL="0">
+            <a:pPr marL="0" indent="0">
               <a:buNone/>
             </a:pPr>
             <a:r>
@@ -2090,7 +2066,7 @@
           <a:bodyPr wrap="square" lIns="0" tIns="0" rIns="0" bIns="0" rtlCol="0" anchor="ctr"/>
           <a:lstStyle/>
           <a:p>
-            <a:pPr indent="0" marL="0">
+            <a:pPr marL="0" indent="0">
               <a:buNone/>
             </a:pPr>
             <a:r>
@@ -2129,7 +2105,7 @@
           <a:bodyPr wrap="square" lIns="0" tIns="0" rIns="0" bIns="0" rtlCol="0" anchor="ctr"/>
           <a:lstStyle/>
           <a:p>
-            <a:pPr indent="0" marL="0">
+            <a:pPr marL="0" indent="0">
               <a:buNone/>
             </a:pPr>
             <a:r>
@@ -2143,9 +2119,6 @@
               </a:rPr>
               <a:t>Track B  </a:t>
             </a:r>
-            <a:pPr indent="0" marL="0">
-              <a:buNone/>
-            </a:pPr>
             <a:r>
               <a:rPr lang="en-US" sz="1150" dirty="0">
                 <a:solidFill>
@@ -2182,7 +2155,7 @@
           <a:bodyPr wrap="square" lIns="0" tIns="0" rIns="0" bIns="0" rtlCol="0" anchor="ctr"/>
           <a:lstStyle/>
           <a:p>
-            <a:pPr indent="0" marL="0">
+            <a:pPr marL="0" indent="0">
               <a:buNone/>
             </a:pPr>
             <a:r>
@@ -2196,9 +2169,6 @@
               </a:rPr>
               <a:t>Part 1 covers  </a:t>
             </a:r>
-            <a:pPr indent="0" marL="0">
-              <a:buNone/>
-            </a:pPr>
             <a:r>
               <a:rPr lang="en-US" sz="1150" dirty="0">
                 <a:solidFill>
@@ -2260,7 +2230,7 @@
           <a:bodyPr wrap="square" lIns="0" tIns="0" rIns="0" bIns="0" rtlCol="0" anchor="ctr"/>
           <a:lstStyle/>
           <a:p>
-            <a:pPr algn="ctr" indent="0" marL="0">
+            <a:pPr marL="0" indent="0" algn="ctr">
               <a:buNone/>
             </a:pPr>
             <a:r>
@@ -2294,6 +2264,7 @@
         <a:solidFill>
           <a:srgbClr val="FFFFFF"/>
         </a:solidFill>
+        <a:effectLst/>
       </p:bgPr>
     </p:bg>
     <p:spTree>
@@ -2356,7 +2327,7 @@
           <a:bodyPr wrap="square" lIns="0" tIns="0" rIns="0" bIns="0" rtlCol="0" anchor="ctr"/>
           <a:lstStyle/>
           <a:p>
-            <a:pPr indent="0" marL="0">
+            <a:pPr marL="0" indent="0">
               <a:buNone/>
             </a:pPr>
             <a:r>
@@ -2422,7 +2393,7 @@
           <a:bodyPr wrap="square" lIns="0" tIns="0" rIns="0" bIns="0" rtlCol="0" anchor="ctr"/>
           <a:lstStyle/>
           <a:p>
-            <a:pPr algn="ctr" indent="0" marL="0">
+            <a:pPr marL="0" indent="0" algn="ctr">
               <a:buNone/>
             </a:pPr>
             <a:r>
@@ -2466,7 +2437,7 @@
             <a:prstDash val="solid"/>
           </a:ln>
           <a:effectLst>
-            <a:outerShdw sx="100000" sy="100000" kx="0" ky="0" algn="bl" rotWithShape="0" blurRad="76200" dist="38100" dir="2700000">
+            <a:outerShdw blurRad="76200" dist="38100" dir="2700000" algn="bl" rotWithShape="0">
               <a:srgbClr val="000000">
                 <a:alpha val="10000"/>
               </a:srgbClr>
@@ -2495,7 +2466,7 @@
           <a:bodyPr wrap="square" lIns="0" tIns="0" rIns="0" bIns="0" rtlCol="0" anchor="ctr"/>
           <a:lstStyle/>
           <a:p>
-            <a:pPr indent="0" marL="0">
+            <a:pPr marL="0" indent="0">
               <a:buNone/>
             </a:pPr>
             <a:r>
@@ -2539,7 +2510,7 @@
             <a:prstDash val="solid"/>
           </a:ln>
           <a:effectLst>
-            <a:outerShdw sx="100000" sy="100000" kx="0" ky="0" algn="bl" rotWithShape="0" blurRad="76200" dist="38100" dir="2700000">
+            <a:outerShdw blurRad="76200" dist="38100" dir="2700000" algn="bl" rotWithShape="0">
               <a:srgbClr val="000000">
                 <a:alpha val="10000"/>
               </a:srgbClr>
@@ -2568,7 +2539,7 @@
           <a:bodyPr wrap="square" lIns="0" tIns="0" rIns="0" bIns="0" rtlCol="0" anchor="ctr"/>
           <a:lstStyle/>
           <a:p>
-            <a:pPr indent="0" marL="0">
+            <a:pPr marL="0" indent="0">
               <a:buNone/>
             </a:pPr>
             <a:r>
@@ -2612,7 +2583,7 @@
             <a:prstDash val="solid"/>
           </a:ln>
           <a:effectLst>
-            <a:outerShdw sx="100000" sy="100000" kx="0" ky="0" algn="bl" rotWithShape="0" blurRad="76200" dist="38100" dir="2700000">
+            <a:outerShdw blurRad="76200" dist="38100" dir="2700000" algn="bl" rotWithShape="0">
               <a:srgbClr val="000000">
                 <a:alpha val="10000"/>
               </a:srgbClr>
@@ -2668,7 +2639,7 @@
           <a:bodyPr wrap="square" lIns="0" tIns="0" rIns="0" bIns="0" rtlCol="0" anchor="ctr"/>
           <a:lstStyle/>
           <a:p>
-            <a:pPr algn="ctr" indent="0" marL="0">
+            <a:pPr marL="0" indent="0" algn="ctr">
               <a:buNone/>
             </a:pPr>
             <a:r>
@@ -2712,7 +2683,7 @@
             <a:prstDash val="solid"/>
           </a:ln>
           <a:effectLst>
-            <a:outerShdw sx="100000" sy="100000" kx="0" ky="0" algn="bl" rotWithShape="0" blurRad="76200" dist="38100" dir="2700000">
+            <a:outerShdw blurRad="76200" dist="38100" dir="2700000" algn="bl" rotWithShape="0">
               <a:srgbClr val="000000">
                 <a:alpha val="10000"/>
               </a:srgbClr>
@@ -2741,7 +2712,7 @@
           <a:bodyPr wrap="square" lIns="0" tIns="0" rIns="0" bIns="0" rtlCol="0" anchor="ctr"/>
           <a:lstStyle/>
           <a:p>
-            <a:pPr algn="ctr" indent="0" marL="0">
+            <a:pPr marL="0" indent="0" algn="ctr">
               <a:buNone/>
             </a:pPr>
             <a:r>
@@ -2785,7 +2756,7 @@
             <a:prstDash val="solid"/>
           </a:ln>
           <a:effectLst>
-            <a:outerShdw sx="100000" sy="100000" kx="0" ky="0" algn="bl" rotWithShape="0" blurRad="76200" dist="38100" dir="2700000">
+            <a:outerShdw blurRad="76200" dist="38100" dir="2700000" algn="bl" rotWithShape="0">
               <a:srgbClr val="000000">
                 <a:alpha val="10000"/>
               </a:srgbClr>
@@ -2814,7 +2785,7 @@
           <a:bodyPr wrap="square" lIns="0" tIns="0" rIns="0" bIns="0" rtlCol="0" anchor="ctr"/>
           <a:lstStyle/>
           <a:p>
-            <a:pPr algn="ctr" indent="0" marL="0">
+            <a:pPr marL="0" indent="0" algn="ctr">
               <a:buNone/>
             </a:pPr>
             <a:r>
@@ -2858,7 +2829,7 @@
             <a:prstDash val="solid"/>
           </a:ln>
           <a:effectLst>
-            <a:outerShdw sx="100000" sy="100000" kx="0" ky="0" algn="bl" rotWithShape="0" blurRad="76200" dist="38100" dir="2700000">
+            <a:outerShdw blurRad="76200" dist="38100" dir="2700000" algn="bl" rotWithShape="0">
               <a:srgbClr val="000000">
                 <a:alpha val="10000"/>
               </a:srgbClr>
@@ -2914,7 +2885,7 @@
           <a:bodyPr wrap="square" lIns="0" tIns="0" rIns="0" bIns="0" rtlCol="0" anchor="ctr"/>
           <a:lstStyle/>
           <a:p>
-            <a:pPr algn="ctr" indent="0" marL="0">
+            <a:pPr marL="0" indent="0" algn="ctr">
               <a:buNone/>
             </a:pPr>
             <a:r>
@@ -2958,7 +2929,7 @@
             <a:prstDash val="solid"/>
           </a:ln>
           <a:effectLst>
-            <a:outerShdw sx="100000" sy="100000" kx="0" ky="0" algn="bl" rotWithShape="0" blurRad="76200" dist="38100" dir="2700000">
+            <a:outerShdw blurRad="76200" dist="38100" dir="2700000" algn="bl" rotWithShape="0">
               <a:srgbClr val="000000">
                 <a:alpha val="10000"/>
               </a:srgbClr>
@@ -2987,7 +2958,7 @@
           <a:bodyPr wrap="square" lIns="0" tIns="0" rIns="0" bIns="0" rtlCol="0" anchor="ctr"/>
           <a:lstStyle/>
           <a:p>
-            <a:pPr algn="ctr" indent="0" marL="0">
+            <a:pPr marL="0" indent="0" algn="ctr">
               <a:buNone/>
             </a:pPr>
             <a:r>
@@ -3031,7 +3002,7 @@
             <a:prstDash val="solid"/>
           </a:ln>
           <a:effectLst>
-            <a:outerShdw sx="100000" sy="100000" kx="0" ky="0" algn="bl" rotWithShape="0" blurRad="76200" dist="38100" dir="2700000">
+            <a:outerShdw blurRad="76200" dist="38100" dir="2700000" algn="bl" rotWithShape="0">
               <a:srgbClr val="000000">
                 <a:alpha val="10000"/>
               </a:srgbClr>
@@ -3060,7 +3031,7 @@
           <a:bodyPr wrap="square" lIns="0" tIns="0" rIns="0" bIns="0" rtlCol="0" anchor="ctr"/>
           <a:lstStyle/>
           <a:p>
-            <a:pPr algn="ctr" indent="0" marL="0">
+            <a:pPr marL="0" indent="0" algn="ctr">
               <a:buNone/>
             </a:pPr>
             <a:r>
@@ -3104,7 +3075,7 @@
             <a:prstDash val="solid"/>
           </a:ln>
           <a:effectLst>
-            <a:outerShdw sx="100000" sy="100000" kx="0" ky="0" algn="bl" rotWithShape="0" blurRad="76200" dist="38100" dir="2700000">
+            <a:outerShdw blurRad="76200" dist="38100" dir="2700000" algn="bl" rotWithShape="0">
               <a:srgbClr val="000000">
                 <a:alpha val="10000"/>
               </a:srgbClr>
@@ -3160,7 +3131,7 @@
           <a:bodyPr wrap="square" lIns="0" tIns="0" rIns="0" bIns="0" rtlCol="0" anchor="ctr"/>
           <a:lstStyle/>
           <a:p>
-            <a:pPr algn="ctr" indent="0" marL="0">
+            <a:pPr marL="0" indent="0" algn="ctr">
               <a:buNone/>
             </a:pPr>
             <a:r>
@@ -3204,7 +3175,7 @@
             <a:prstDash val="solid"/>
           </a:ln>
           <a:effectLst>
-            <a:outerShdw sx="100000" sy="100000" kx="0" ky="0" algn="bl" rotWithShape="0" blurRad="76200" dist="38100" dir="2700000">
+            <a:outerShdw blurRad="76200" dist="38100" dir="2700000" algn="bl" rotWithShape="0">
               <a:srgbClr val="000000">
                 <a:alpha val="10000"/>
               </a:srgbClr>
@@ -3233,7 +3204,7 @@
           <a:bodyPr wrap="square" lIns="0" tIns="0" rIns="0" bIns="0" rtlCol="0" anchor="ctr"/>
           <a:lstStyle/>
           <a:p>
-            <a:pPr algn="ctr" indent="0" marL="0">
+            <a:pPr marL="0" indent="0" algn="ctr">
               <a:buNone/>
             </a:pPr>
             <a:r>
@@ -3277,7 +3248,7 @@
             <a:prstDash val="solid"/>
           </a:ln>
           <a:effectLst>
-            <a:outerShdw sx="100000" sy="100000" kx="0" ky="0" algn="bl" rotWithShape="0" blurRad="76200" dist="38100" dir="2700000">
+            <a:outerShdw blurRad="76200" dist="38100" dir="2700000" algn="bl" rotWithShape="0">
               <a:srgbClr val="000000">
                 <a:alpha val="10000"/>
               </a:srgbClr>
@@ -3306,7 +3277,7 @@
           <a:bodyPr wrap="square" lIns="0" tIns="0" rIns="0" bIns="0" rtlCol="0" anchor="ctr"/>
           <a:lstStyle/>
           <a:p>
-            <a:pPr algn="ctr" indent="0" marL="0">
+            <a:pPr marL="0" indent="0" algn="ctr">
               <a:buNone/>
             </a:pPr>
             <a:r>
@@ -3345,7 +3316,7 @@
           <a:bodyPr wrap="square" lIns="0" tIns="0" rIns="0" bIns="0" rtlCol="0" anchor="ctr"/>
           <a:lstStyle/>
           <a:p>
-            <a:pPr indent="0" marL="0">
+            <a:pPr marL="0" indent="0">
               <a:buNone/>
             </a:pPr>
             <a:r>
@@ -3409,7 +3380,7 @@
           <a:bodyPr wrap="square" lIns="0" tIns="0" rIns="0" bIns="0" rtlCol="0" anchor="ctr"/>
           <a:lstStyle/>
           <a:p>
-            <a:pPr indent="0" marL="0">
+            <a:pPr marL="0" indent="0">
               <a:buNone/>
             </a:pPr>
             <a:r>
@@ -3448,7 +3419,7 @@
           <a:bodyPr wrap="square" lIns="0" tIns="0" rIns="0" bIns="0" rtlCol="0" anchor="ctr"/>
           <a:lstStyle/>
           <a:p>
-            <a:pPr indent="0" marL="0">
+            <a:pPr marL="0" indent="0">
               <a:buNone/>
             </a:pPr>
             <a:r>
@@ -3512,7 +3483,7 @@
           <a:bodyPr wrap="square" lIns="0" tIns="0" rIns="0" bIns="0" rtlCol="0" anchor="ctr"/>
           <a:lstStyle/>
           <a:p>
-            <a:pPr indent="0" marL="0">
+            <a:pPr marL="0" indent="0">
               <a:buNone/>
             </a:pPr>
             <a:r>
@@ -3551,7 +3522,7 @@
           <a:bodyPr wrap="square" lIns="0" tIns="0" rIns="0" bIns="0" rtlCol="0" anchor="ctr"/>
           <a:lstStyle/>
           <a:p>
-            <a:pPr indent="0" marL="0">
+            <a:pPr marL="0" indent="0">
               <a:buNone/>
             </a:pPr>
             <a:r>
@@ -3615,7 +3586,7 @@
           <a:bodyPr wrap="square" lIns="0" tIns="0" rIns="0" bIns="0" rtlCol="0" anchor="ctr"/>
           <a:lstStyle/>
           <a:p>
-            <a:pPr indent="0" marL="0">
+            <a:pPr marL="0" indent="0">
               <a:buNone/>
             </a:pPr>
             <a:r>
@@ -3654,7 +3625,7 @@
           <a:bodyPr wrap="square" lIns="0" tIns="0" rIns="0" bIns="0" rtlCol="0" anchor="ctr"/>
           <a:lstStyle/>
           <a:p>
-            <a:pPr indent="0" marL="0">
+            <a:pPr marL="0" indent="0">
               <a:buNone/>
             </a:pPr>
             <a:r>
@@ -3718,7 +3689,7 @@
           <a:bodyPr wrap="square" lIns="0" tIns="0" rIns="0" bIns="0" rtlCol="0" anchor="ctr"/>
           <a:lstStyle/>
           <a:p>
-            <a:pPr indent="0" marL="0">
+            <a:pPr marL="0" indent="0">
               <a:buNone/>
             </a:pPr>
             <a:r>
@@ -3757,7 +3728,7 @@
           <a:bodyPr wrap="square" lIns="0" tIns="0" rIns="0" bIns="0" rtlCol="0" anchor="ctr"/>
           <a:lstStyle/>
           <a:p>
-            <a:pPr indent="0" marL="0">
+            <a:pPr marL="0" indent="0">
               <a:buNone/>
             </a:pPr>
             <a:r>
@@ -3821,7 +3792,7 @@
           <a:bodyPr wrap="square" lIns="0" tIns="0" rIns="0" bIns="0" rtlCol="0" anchor="ctr"/>
           <a:lstStyle/>
           <a:p>
-            <a:pPr indent="0" marL="0">
+            <a:pPr marL="0" indent="0">
               <a:buNone/>
             </a:pPr>
             <a:r>
@@ -3860,7 +3831,7 @@
           <a:bodyPr wrap="square" lIns="0" tIns="0" rIns="0" bIns="0" rtlCol="0" anchor="ctr"/>
           <a:lstStyle/>
           <a:p>
-            <a:pPr indent="0" marL="0">
+            <a:pPr marL="0" indent="0">
               <a:buNone/>
             </a:pPr>
             <a:r>
@@ -3924,7 +3895,7 @@
           <a:bodyPr wrap="square" lIns="0" tIns="0" rIns="0" bIns="0" rtlCol="0" anchor="ctr"/>
           <a:lstStyle/>
           <a:p>
-            <a:pPr algn="ctr" indent="0" marL="0">
+            <a:pPr marL="0" indent="0" algn="ctr">
               <a:buNone/>
             </a:pPr>
             <a:r>
@@ -3958,6 +3929,7 @@
         <a:solidFill>
           <a:srgbClr val="FFFFFF"/>
         </a:solidFill>
+        <a:effectLst/>
       </p:bgPr>
     </p:bg>
     <p:spTree>
@@ -4020,7 +3992,7 @@
           <a:bodyPr wrap="square" lIns="0" tIns="0" rIns="0" bIns="0" rtlCol="0" anchor="ctr"/>
           <a:lstStyle/>
           <a:p>
-            <a:pPr indent="0" marL="0">
+            <a:pPr marL="0" indent="0">
               <a:buNone/>
             </a:pPr>
             <a:r>
@@ -4086,7 +4058,7 @@
           <a:bodyPr wrap="square" lIns="0" tIns="0" rIns="0" bIns="0" rtlCol="0" anchor="ctr"/>
           <a:lstStyle/>
           <a:p>
-            <a:pPr algn="ctr" indent="0" marL="0">
+            <a:pPr marL="0" indent="0" algn="ctr">
               <a:buNone/>
             </a:pPr>
             <a:r>
@@ -4130,7 +4102,7 @@
             <a:prstDash val="solid"/>
           </a:ln>
           <a:effectLst>
-            <a:outerShdw sx="100000" sy="100000" kx="0" ky="0" algn="bl" rotWithShape="0" blurRad="76200" dist="38100" dir="2700000">
+            <a:outerShdw blurRad="76200" dist="38100" dir="2700000" algn="bl" rotWithShape="0">
               <a:srgbClr val="000000">
                 <a:alpha val="10000"/>
               </a:srgbClr>
@@ -4159,7 +4131,7 @@
           <a:bodyPr wrap="square" lIns="0" tIns="0" rIns="0" bIns="0" rtlCol="0" anchor="ctr"/>
           <a:lstStyle/>
           <a:p>
-            <a:pPr indent="0" marL="0">
+            <a:pPr marL="0" indent="0">
               <a:buNone/>
             </a:pPr>
             <a:r>
@@ -4203,7 +4175,7 @@
             <a:prstDash val="solid"/>
           </a:ln>
           <a:effectLst>
-            <a:outerShdw sx="100000" sy="100000" kx="0" ky="0" algn="bl" rotWithShape="0" blurRad="76200" dist="38100" dir="2700000">
+            <a:outerShdw blurRad="76200" dist="38100" dir="2700000" algn="bl" rotWithShape="0">
               <a:srgbClr val="000000">
                 <a:alpha val="10000"/>
               </a:srgbClr>
@@ -4232,7 +4204,7 @@
           <a:bodyPr wrap="square" lIns="0" tIns="0" rIns="0" bIns="0" rtlCol="0" anchor="ctr"/>
           <a:lstStyle/>
           <a:p>
-            <a:pPr indent="0" marL="0">
+            <a:pPr marL="0" indent="0">
               <a:buNone/>
             </a:pPr>
             <a:r>
@@ -4271,7 +4243,7 @@
           <a:bodyPr wrap="square" lIns="0" tIns="0" rIns="0" bIns="0" rtlCol="0" anchor="ctr"/>
           <a:lstStyle/>
           <a:p>
-            <a:pPr indent="0" marL="0">
+            <a:pPr marL="0" indent="0">
               <a:buNone/>
             </a:pPr>
             <a:r>
@@ -4310,7 +4282,7 @@
           <a:bodyPr wrap="square" lIns="0" tIns="0" rIns="0" bIns="0" rtlCol="0" anchor="ctr"/>
           <a:lstStyle/>
           <a:p>
-            <a:pPr indent="0" marL="0">
+            <a:pPr marL="0" indent="0">
               <a:buNone/>
             </a:pPr>
             <a:r>
@@ -4349,7 +4321,7 @@
           <a:bodyPr wrap="square" lIns="0" tIns="0" rIns="0" bIns="0" rtlCol="0" anchor="ctr"/>
           <a:lstStyle/>
           <a:p>
-            <a:pPr indent="0" marL="0">
+            <a:pPr marL="0" indent="0">
               <a:buNone/>
             </a:pPr>
             <a:r>
@@ -4388,7 +4360,7 @@
           <a:bodyPr wrap="square" lIns="0" tIns="0" rIns="0" bIns="0" rtlCol="0" anchor="ctr"/>
           <a:lstStyle/>
           <a:p>
-            <a:pPr indent="0" marL="0">
+            <a:pPr marL="0" indent="0">
               <a:buNone/>
             </a:pPr>
             <a:r>
@@ -4427,7 +4399,7 @@
           <a:bodyPr wrap="square" lIns="0" tIns="0" rIns="0" bIns="0" rtlCol="0" anchor="ctr"/>
           <a:lstStyle/>
           <a:p>
-            <a:pPr indent="0" marL="0">
+            <a:pPr marL="0" indent="0">
               <a:buNone/>
             </a:pPr>
             <a:r>
@@ -4466,7 +4438,7 @@
           <a:bodyPr wrap="square" lIns="0" tIns="0" rIns="0" bIns="0" rtlCol="0" anchor="ctr"/>
           <a:lstStyle/>
           <a:p>
-            <a:pPr indent="0" marL="0">
+            <a:pPr marL="0" indent="0">
               <a:buNone/>
             </a:pPr>
             <a:r>
@@ -4505,7 +4477,7 @@
           <a:bodyPr wrap="square" lIns="0" tIns="0" rIns="0" bIns="0" rtlCol="0" anchor="ctr"/>
           <a:lstStyle/>
           <a:p>
-            <a:pPr indent="0" marL="0">
+            <a:pPr marL="0" indent="0">
               <a:buNone/>
             </a:pPr>
             <a:r>
@@ -4544,7 +4516,7 @@
           <a:bodyPr wrap="square" lIns="0" tIns="0" rIns="0" bIns="0" rtlCol="0" anchor="ctr"/>
           <a:lstStyle/>
           <a:p>
-            <a:pPr indent="0" marL="0">
+            <a:pPr marL="0" indent="0">
               <a:buNone/>
             </a:pPr>
             <a:r>
@@ -4583,7 +4555,7 @@
           <a:bodyPr wrap="square" lIns="0" tIns="0" rIns="0" bIns="0" rtlCol="0" anchor="ctr"/>
           <a:lstStyle/>
           <a:p>
-            <a:pPr indent="0" marL="0">
+            <a:pPr marL="0" indent="0">
               <a:buNone/>
             </a:pPr>
             <a:r>
@@ -4622,7 +4594,7 @@
           <a:bodyPr wrap="square" lIns="0" tIns="0" rIns="0" bIns="0" rtlCol="0" anchor="ctr"/>
           <a:lstStyle/>
           <a:p>
-            <a:pPr indent="0" marL="0">
+            <a:pPr marL="0" indent="0">
               <a:buNone/>
             </a:pPr>
             <a:r>
@@ -4661,7 +4633,7 @@
           <a:bodyPr wrap="square" lIns="0" tIns="0" rIns="0" bIns="0" rtlCol="0" anchor="ctr"/>
           <a:lstStyle/>
           <a:p>
-            <a:pPr indent="0" marL="0">
+            <a:pPr marL="0" indent="0">
               <a:buNone/>
             </a:pPr>
             <a:r>
@@ -4700,7 +4672,7 @@
           <a:bodyPr wrap="square" lIns="0" tIns="0" rIns="0" bIns="0" rtlCol="0" anchor="ctr"/>
           <a:lstStyle/>
           <a:p>
-            <a:pPr indent="0" marL="0">
+            <a:pPr marL="0" indent="0">
               <a:buNone/>
             </a:pPr>
             <a:r>
@@ -4744,7 +4716,7 @@
             <a:prstDash val="solid"/>
           </a:ln>
           <a:effectLst>
-            <a:outerShdw sx="100000" sy="100000" kx="0" ky="0" algn="bl" rotWithShape="0" blurRad="76200" dist="38100" dir="2700000">
+            <a:outerShdw blurRad="76200" dist="38100" dir="2700000" algn="bl" rotWithShape="0">
               <a:srgbClr val="000000">
                 <a:alpha val="10000"/>
               </a:srgbClr>
@@ -4800,7 +4772,7 @@
           <a:bodyPr wrap="square" lIns="0" tIns="0" rIns="0" bIns="0" rtlCol="0" anchor="ctr"/>
           <a:lstStyle/>
           <a:p>
-            <a:pPr algn="ctr" indent="0" marL="0">
+            <a:pPr marL="0" indent="0" algn="ctr">
               <a:buNone/>
             </a:pPr>
             <a:r>
@@ -4839,7 +4811,7 @@
           <a:bodyPr wrap="square" lIns="0" tIns="0" rIns="0" bIns="0" rtlCol="0" anchor="ctr"/>
           <a:lstStyle/>
           <a:p>
-            <a:pPr indent="0" marL="0">
+            <a:pPr marL="0" indent="0">
               <a:buNone/>
             </a:pPr>
             <a:r>
@@ -4878,7 +4850,7 @@
           <a:bodyPr wrap="square" lIns="0" tIns="0" rIns="0" bIns="0" rtlCol="0" anchor="ctr"/>
           <a:lstStyle/>
           <a:p>
-            <a:pPr indent="0" marL="0">
+            <a:pPr marL="0" indent="0">
               <a:buNone/>
             </a:pPr>
             <a:r>
@@ -4917,7 +4889,7 @@
           <a:bodyPr wrap="square" lIns="0" tIns="0" rIns="0" bIns="0" rtlCol="0" anchor="ctr"/>
           <a:lstStyle/>
           <a:p>
-            <a:pPr indent="0" marL="0">
+            <a:pPr marL="0" indent="0">
               <a:buNone/>
             </a:pPr>
             <a:r>
@@ -4956,7 +4928,7 @@
           <a:bodyPr wrap="square" lIns="0" tIns="0" rIns="0" bIns="0" rtlCol="0" anchor="ctr"/>
           <a:lstStyle/>
           <a:p>
-            <a:pPr indent="0" marL="0">
+            <a:pPr marL="0" indent="0">
               <a:buNone/>
             </a:pPr>
             <a:r>
@@ -5000,7 +4972,7 @@
             <a:prstDash val="solid"/>
           </a:ln>
           <a:effectLst>
-            <a:outerShdw sx="100000" sy="100000" kx="0" ky="0" algn="bl" rotWithShape="0" blurRad="76200" dist="38100" dir="2700000">
+            <a:outerShdw blurRad="76200" dist="38100" dir="2700000" algn="bl" rotWithShape="0">
               <a:srgbClr val="000000">
                 <a:alpha val="10000"/>
               </a:srgbClr>
@@ -5056,7 +5028,7 @@
           <a:bodyPr wrap="square" lIns="0" tIns="0" rIns="0" bIns="0" rtlCol="0" anchor="ctr"/>
           <a:lstStyle/>
           <a:p>
-            <a:pPr algn="ctr" indent="0" marL="0">
+            <a:pPr marL="0" indent="0" algn="ctr">
               <a:buNone/>
             </a:pPr>
             <a:r>
@@ -5095,7 +5067,7 @@
           <a:bodyPr wrap="square" lIns="0" tIns="0" rIns="0" bIns="0" rtlCol="0" anchor="ctr"/>
           <a:lstStyle/>
           <a:p>
-            <a:pPr indent="0" marL="0">
+            <a:pPr marL="0" indent="0">
               <a:buNone/>
             </a:pPr>
             <a:r>
@@ -5134,7 +5106,7 @@
           <a:bodyPr wrap="square" lIns="0" tIns="0" rIns="0" bIns="0" rtlCol="0" anchor="ctr"/>
           <a:lstStyle/>
           <a:p>
-            <a:pPr indent="0" marL="0">
+            <a:pPr marL="0" indent="0">
               <a:buNone/>
             </a:pPr>
             <a:r>
@@ -5173,7 +5145,7 @@
           <a:bodyPr wrap="square" lIns="0" tIns="0" rIns="0" bIns="0" rtlCol="0" anchor="ctr"/>
           <a:lstStyle/>
           <a:p>
-            <a:pPr indent="0" marL="0">
+            <a:pPr marL="0" indent="0">
               <a:buNone/>
             </a:pPr>
             <a:r>
@@ -5212,7 +5184,7 @@
           <a:bodyPr wrap="square" lIns="0" tIns="0" rIns="0" bIns="0" rtlCol="0" anchor="ctr"/>
           <a:lstStyle/>
           <a:p>
-            <a:pPr indent="0" marL="0">
+            <a:pPr marL="0" indent="0">
               <a:buNone/>
             </a:pPr>
             <a:r>
@@ -5256,7 +5228,7 @@
             <a:prstDash val="solid"/>
           </a:ln>
           <a:effectLst>
-            <a:outerShdw sx="100000" sy="100000" kx="0" ky="0" algn="bl" rotWithShape="0" blurRad="76200" dist="38100" dir="2700000">
+            <a:outerShdw blurRad="76200" dist="38100" dir="2700000" algn="bl" rotWithShape="0">
               <a:srgbClr val="000000">
                 <a:alpha val="10000"/>
               </a:srgbClr>
@@ -5285,7 +5257,7 @@
           <a:bodyPr wrap="square" lIns="0" tIns="0" rIns="0" bIns="0" rtlCol="0" anchor="ctr"/>
           <a:lstStyle/>
           <a:p>
-            <a:pPr indent="0" marL="0">
+            <a:pPr marL="0" indent="0">
               <a:buNone/>
             </a:pPr>
             <a:r>
@@ -5312,19 +5284,19 @@
         <p:spPr>
           <a:xfrm>
             <a:off x="457200" y="5157216"/>
-            <a:ext cx="8229600" cy="-118872"/>
-          </a:xfrm>
-          <a:prstGeom prst="rect">
-            <a:avLst/>
-          </a:prstGeom>
-          <a:noFill/>
-          <a:ln/>
-        </p:spPr>
-        <p:txBody>
-          <a:bodyPr wrap="square" lIns="0" tIns="0" rIns="0" bIns="0" rtlCol="0" anchor="ctr"/>
-          <a:lstStyle/>
-          <a:p>
-            <a:pPr indent="0" marL="0">
+            <a:ext cx="8229600" cy="0"/>
+          </a:xfrm>
+          <a:prstGeom prst="rect">
+            <a:avLst/>
+          </a:prstGeom>
+          <a:noFill/>
+          <a:ln/>
+        </p:spPr>
+        <p:txBody>
+          <a:bodyPr wrap="square" lIns="0" tIns="0" rIns="0" bIns="0" rtlCol="0" anchor="ctr"/>
+          <a:lstStyle/>
+          <a:p>
+            <a:pPr marL="0" indent="0">
               <a:buNone/>
             </a:pPr>
             <a:r>
@@ -5388,7 +5360,7 @@
           <a:bodyPr wrap="square" lIns="0" tIns="0" rIns="0" bIns="0" rtlCol="0" anchor="ctr"/>
           <a:lstStyle/>
           <a:p>
-            <a:pPr algn="ctr" indent="0" marL="0">
+            <a:pPr marL="0" indent="0" algn="ctr">
               <a:buNone/>
             </a:pPr>
             <a:r>
@@ -5422,6 +5394,7 @@
         <a:solidFill>
           <a:srgbClr val="FFFFFF"/>
         </a:solidFill>
+        <a:effectLst/>
       </p:bgPr>
     </p:bg>
     <p:spTree>
@@ -5484,7 +5457,7 @@
           <a:bodyPr wrap="square" lIns="0" tIns="0" rIns="0" bIns="0" rtlCol="0" anchor="ctr"/>
           <a:lstStyle/>
           <a:p>
-            <a:pPr indent="0" marL="0">
+            <a:pPr marL="0" indent="0">
               <a:buNone/>
             </a:pPr>
             <a:r>
@@ -5550,7 +5523,7 @@
           <a:bodyPr wrap="square" lIns="0" tIns="0" rIns="0" bIns="0" rtlCol="0" anchor="ctr"/>
           <a:lstStyle/>
           <a:p>
-            <a:pPr algn="ctr" indent="0" marL="0">
+            <a:pPr marL="0" indent="0" algn="ctr">
               <a:buNone/>
             </a:pPr>
             <a:r>
@@ -5594,7 +5567,7 @@
             <a:prstDash val="solid"/>
           </a:ln>
           <a:effectLst>
-            <a:outerShdw sx="100000" sy="100000" kx="0" ky="0" algn="bl" rotWithShape="0" blurRad="76200" dist="38100" dir="2700000">
+            <a:outerShdw blurRad="76200" dist="38100" dir="2700000" algn="bl" rotWithShape="0">
               <a:srgbClr val="000000">
                 <a:alpha val="10000"/>
               </a:srgbClr>
@@ -5650,7 +5623,7 @@
           <a:bodyPr wrap="square" lIns="0" tIns="0" rIns="0" bIns="0" rtlCol="0" anchor="ctr"/>
           <a:lstStyle/>
           <a:p>
-            <a:pPr algn="ctr" indent="0" marL="0">
+            <a:pPr marL="0" indent="0" algn="ctr">
               <a:buNone/>
             </a:pPr>
             <a:r>
@@ -5689,7 +5662,7 @@
           <a:bodyPr wrap="square" lIns="0" tIns="0" rIns="0" bIns="0" rtlCol="0" anchor="ctr"/>
           <a:lstStyle/>
           <a:p>
-            <a:pPr indent="0" marL="0">
+            <a:pPr marL="0" indent="0">
               <a:buNone/>
             </a:pPr>
             <a:r>
@@ -5728,7 +5701,7 @@
           <a:bodyPr wrap="square" lIns="0" tIns="0" rIns="0" bIns="0" rtlCol="0" anchor="ctr"/>
           <a:lstStyle/>
           <a:p>
-            <a:pPr indent="0" marL="0">
+            <a:pPr marL="0" indent="0">
               <a:buNone/>
             </a:pPr>
             <a:r>
@@ -5772,7 +5745,7 @@
             <a:prstDash val="solid"/>
           </a:ln>
           <a:effectLst>
-            <a:outerShdw sx="100000" sy="100000" kx="0" ky="0" algn="bl" rotWithShape="0" blurRad="76200" dist="38100" dir="2700000">
+            <a:outerShdw blurRad="76200" dist="38100" dir="2700000" algn="bl" rotWithShape="0">
               <a:srgbClr val="000000">
                 <a:alpha val="10000"/>
               </a:srgbClr>
@@ -5828,7 +5801,7 @@
           <a:bodyPr wrap="square" lIns="0" tIns="0" rIns="0" bIns="0" rtlCol="0" anchor="ctr"/>
           <a:lstStyle/>
           <a:p>
-            <a:pPr algn="ctr" indent="0" marL="0">
+            <a:pPr marL="0" indent="0" algn="ctr">
               <a:buNone/>
             </a:pPr>
             <a:r>
@@ -5867,7 +5840,7 @@
           <a:bodyPr wrap="square" lIns="0" tIns="0" rIns="0" bIns="0" rtlCol="0" anchor="ctr"/>
           <a:lstStyle/>
           <a:p>
-            <a:pPr indent="0" marL="0">
+            <a:pPr marL="0" indent="0">
               <a:buNone/>
             </a:pPr>
             <a:r>
@@ -5906,7 +5879,7 @@
           <a:bodyPr wrap="square" lIns="0" tIns="0" rIns="0" bIns="0" rtlCol="0" anchor="ctr"/>
           <a:lstStyle/>
           <a:p>
-            <a:pPr indent="0" marL="0">
+            <a:pPr marL="0" indent="0">
               <a:buNone/>
             </a:pPr>
             <a:r>
@@ -5950,7 +5923,7 @@
             <a:prstDash val="solid"/>
           </a:ln>
           <a:effectLst>
-            <a:outerShdw sx="100000" sy="100000" kx="0" ky="0" algn="bl" rotWithShape="0" blurRad="76200" dist="38100" dir="2700000">
+            <a:outerShdw blurRad="76200" dist="38100" dir="2700000" algn="bl" rotWithShape="0">
               <a:srgbClr val="000000">
                 <a:alpha val="10000"/>
               </a:srgbClr>
@@ -6006,7 +5979,7 @@
           <a:bodyPr wrap="square" lIns="0" tIns="0" rIns="0" bIns="0" rtlCol="0" anchor="ctr"/>
           <a:lstStyle/>
           <a:p>
-            <a:pPr algn="ctr" indent="0" marL="0">
+            <a:pPr marL="0" indent="0" algn="ctr">
               <a:buNone/>
             </a:pPr>
             <a:r>
@@ -6045,7 +6018,7 @@
           <a:bodyPr wrap="square" lIns="0" tIns="0" rIns="0" bIns="0" rtlCol="0" anchor="ctr"/>
           <a:lstStyle/>
           <a:p>
-            <a:pPr indent="0" marL="0">
+            <a:pPr marL="0" indent="0">
               <a:buNone/>
             </a:pPr>
             <a:r>
@@ -6084,7 +6057,7 @@
           <a:bodyPr wrap="square" lIns="0" tIns="0" rIns="0" bIns="0" rtlCol="0" anchor="ctr"/>
           <a:lstStyle/>
           <a:p>
-            <a:pPr indent="0" marL="0">
+            <a:pPr marL="0" indent="0">
               <a:buNone/>
             </a:pPr>
             <a:r>
@@ -6148,7 +6121,7 @@
           <a:bodyPr wrap="square" lIns="0" tIns="0" rIns="0" bIns="0" rtlCol="0" anchor="ctr"/>
           <a:lstStyle/>
           <a:p>
-            <a:pPr algn="ctr" indent="0" marL="0">
+            <a:pPr marL="0" indent="0" algn="ctr">
               <a:buNone/>
             </a:pPr>
             <a:r>
@@ -6182,6 +6155,7 @@
         <a:solidFill>
           <a:srgbClr val="FFFFFF"/>
         </a:solidFill>
+        <a:effectLst/>
       </p:bgPr>
     </p:bg>
     <p:spTree>
@@ -6244,7 +6218,7 @@
           <a:bodyPr wrap="square" lIns="0" tIns="0" rIns="0" bIns="0" rtlCol="0" anchor="ctr"/>
           <a:lstStyle/>
           <a:p>
-            <a:pPr indent="0" marL="0">
+            <a:pPr marL="0" indent="0">
               <a:buNone/>
             </a:pPr>
             <a:r>
@@ -6310,7 +6284,7 @@
           <a:bodyPr wrap="square" lIns="0" tIns="0" rIns="0" bIns="0" rtlCol="0" anchor="ctr"/>
           <a:lstStyle/>
           <a:p>
-            <a:pPr algn="ctr" indent="0" marL="0">
+            <a:pPr marL="0" indent="0" algn="ctr">
               <a:buNone/>
             </a:pPr>
             <a:r>
@@ -6376,7 +6350,7 @@
           <a:bodyPr wrap="square" lIns="0" tIns="0" rIns="0" bIns="0" rtlCol="0" anchor="ctr"/>
           <a:lstStyle/>
           <a:p>
-            <a:pPr algn="ctr" indent="0" marL="0">
+            <a:pPr marL="0" indent="0" algn="ctr">
               <a:buNone/>
             </a:pPr>
             <a:r>
@@ -6420,7 +6394,7 @@
             <a:prstDash val="solid"/>
           </a:ln>
           <a:effectLst>
-            <a:outerShdw sx="100000" sy="100000" kx="0" ky="0" algn="bl" rotWithShape="0" blurRad="76200" dist="38100" dir="2700000">
+            <a:outerShdw blurRad="76200" dist="38100" dir="2700000" algn="bl" rotWithShape="0">
               <a:srgbClr val="000000">
                 <a:alpha val="10000"/>
               </a:srgbClr>
@@ -6476,7 +6450,7 @@
           <a:bodyPr wrap="square" lIns="0" tIns="0" rIns="0" bIns="0" rtlCol="0" anchor="ctr"/>
           <a:lstStyle/>
           <a:p>
-            <a:pPr algn="ctr" indent="0" marL="0">
+            <a:pPr marL="0" indent="0" algn="ctr">
               <a:buNone/>
             </a:pPr>
             <a:r>
@@ -6515,7 +6489,7 @@
           <a:bodyPr wrap="square" lIns="0" tIns="0" rIns="0" bIns="0" rtlCol="0" anchor="ctr"/>
           <a:lstStyle/>
           <a:p>
-            <a:pPr indent="0" marL="0">
+            <a:pPr marL="0" indent="0">
               <a:buNone/>
             </a:pPr>
             <a:r>
@@ -6554,7 +6528,7 @@
           <a:bodyPr wrap="square" lIns="0" tIns="0" rIns="0" bIns="0" rtlCol="0" anchor="ctr"/>
           <a:lstStyle/>
           <a:p>
-            <a:pPr indent="0" marL="0">
+            <a:pPr marL="0" indent="0">
               <a:buNone/>
             </a:pPr>
             <a:r>
@@ -6593,7 +6567,7 @@
           <a:bodyPr wrap="square" lIns="0" tIns="0" rIns="0" bIns="0" rtlCol="0" anchor="ctr"/>
           <a:lstStyle/>
           <a:p>
-            <a:pPr indent="0" marL="0">
+            <a:pPr marL="0" indent="0">
               <a:buNone/>
             </a:pPr>
             <a:r>
@@ -6632,7 +6606,7 @@
           <a:bodyPr wrap="square" lIns="0" tIns="0" rIns="0" bIns="0" rtlCol="0" anchor="ctr"/>
           <a:lstStyle/>
           <a:p>
-            <a:pPr indent="0" marL="0">
+            <a:pPr marL="0" indent="0">
               <a:buNone/>
             </a:pPr>
             <a:r>
@@ -6671,7 +6645,7 @@
           <a:bodyPr wrap="square" lIns="0" tIns="0" rIns="0" bIns="0" rtlCol="0" anchor="ctr"/>
           <a:lstStyle/>
           <a:p>
-            <a:pPr indent="0" marL="0">
+            <a:pPr marL="0" indent="0">
               <a:buNone/>
             </a:pPr>
             <a:r>
@@ -6710,7 +6684,7 @@
           <a:bodyPr wrap="square" lIns="0" tIns="0" rIns="0" bIns="0" rtlCol="0" anchor="ctr"/>
           <a:lstStyle/>
           <a:p>
-            <a:pPr indent="0" marL="0">
+            <a:pPr marL="0" indent="0">
               <a:buNone/>
             </a:pPr>
             <a:r>
@@ -6754,7 +6728,7 @@
             <a:prstDash val="solid"/>
           </a:ln>
           <a:effectLst>
-            <a:outerShdw sx="100000" sy="100000" kx="0" ky="0" algn="bl" rotWithShape="0" blurRad="76200" dist="38100" dir="2700000">
+            <a:outerShdw blurRad="76200" dist="38100" dir="2700000" algn="bl" rotWithShape="0">
               <a:srgbClr val="000000">
                 <a:alpha val="10000"/>
               </a:srgbClr>
@@ -6810,7 +6784,7 @@
           <a:bodyPr wrap="square" lIns="0" tIns="0" rIns="0" bIns="0" rtlCol="0" anchor="ctr"/>
           <a:lstStyle/>
           <a:p>
-            <a:pPr algn="ctr" indent="0" marL="0">
+            <a:pPr marL="0" indent="0" algn="ctr">
               <a:buNone/>
             </a:pPr>
             <a:r>
@@ -6849,7 +6823,7 @@
           <a:bodyPr wrap="square" lIns="0" tIns="0" rIns="0" bIns="0" rtlCol="0" anchor="ctr"/>
           <a:lstStyle/>
           <a:p>
-            <a:pPr indent="0" marL="0">
+            <a:pPr marL="0" indent="0">
               <a:buNone/>
             </a:pPr>
             <a:r>
@@ -6888,7 +6862,7 @@
           <a:bodyPr wrap="square" lIns="0" tIns="0" rIns="0" bIns="0" rtlCol="0" anchor="ctr"/>
           <a:lstStyle/>
           <a:p>
-            <a:pPr indent="0" marL="0">
+            <a:pPr marL="0" indent="0">
               <a:buNone/>
             </a:pPr>
             <a:r>
@@ -6927,7 +6901,7 @@
           <a:bodyPr wrap="square" lIns="0" tIns="0" rIns="0" bIns="0" rtlCol="0" anchor="ctr"/>
           <a:lstStyle/>
           <a:p>
-            <a:pPr indent="0" marL="0">
+            <a:pPr marL="0" indent="0">
               <a:buNone/>
             </a:pPr>
             <a:r>
@@ -6966,7 +6940,7 @@
           <a:bodyPr wrap="square" lIns="0" tIns="0" rIns="0" bIns="0" rtlCol="0" anchor="ctr"/>
           <a:lstStyle/>
           <a:p>
-            <a:pPr indent="0" marL="0">
+            <a:pPr marL="0" indent="0">
               <a:buNone/>
             </a:pPr>
             <a:r>
@@ -7005,7 +6979,7 @@
           <a:bodyPr wrap="square" lIns="0" tIns="0" rIns="0" bIns="0" rtlCol="0" anchor="ctr"/>
           <a:lstStyle/>
           <a:p>
-            <a:pPr indent="0" marL="0">
+            <a:pPr marL="0" indent="0">
               <a:buNone/>
             </a:pPr>
             <a:r>
@@ -7049,7 +7023,7 @@
             <a:prstDash val="solid"/>
           </a:ln>
           <a:effectLst>
-            <a:outerShdw sx="100000" sy="100000" kx="0" ky="0" algn="bl" rotWithShape="0" blurRad="76200" dist="38100" dir="2700000">
+            <a:outerShdw blurRad="76200" dist="38100" dir="2700000" algn="bl" rotWithShape="0">
               <a:srgbClr val="000000">
                 <a:alpha val="10000"/>
               </a:srgbClr>
@@ -7105,7 +7079,7 @@
           <a:bodyPr wrap="square" lIns="0" tIns="0" rIns="0" bIns="0" rtlCol="0" anchor="ctr"/>
           <a:lstStyle/>
           <a:p>
-            <a:pPr algn="ctr" indent="0" marL="0">
+            <a:pPr marL="0" indent="0" algn="ctr">
               <a:buNone/>
             </a:pPr>
             <a:r>
@@ -7144,7 +7118,7 @@
           <a:bodyPr wrap="square" lIns="0" tIns="0" rIns="0" bIns="0" rtlCol="0" anchor="ctr"/>
           <a:lstStyle/>
           <a:p>
-            <a:pPr indent="0" marL="0">
+            <a:pPr marL="0" indent="0">
               <a:buNone/>
             </a:pPr>
             <a:r>
@@ -7183,7 +7157,7 @@
           <a:bodyPr wrap="square" lIns="0" tIns="0" rIns="0" bIns="0" rtlCol="0" anchor="ctr"/>
           <a:lstStyle/>
           <a:p>
-            <a:pPr indent="0" marL="0">
+            <a:pPr marL="0" indent="0">
               <a:buNone/>
             </a:pPr>
             <a:r>
@@ -7222,7 +7196,7 @@
           <a:bodyPr wrap="square" lIns="0" tIns="0" rIns="0" bIns="0" rtlCol="0" anchor="ctr"/>
           <a:lstStyle/>
           <a:p>
-            <a:pPr indent="0" marL="0">
+            <a:pPr marL="0" indent="0">
               <a:buNone/>
             </a:pPr>
             <a:r>
@@ -7261,7 +7235,7 @@
           <a:bodyPr wrap="square" lIns="0" tIns="0" rIns="0" bIns="0" rtlCol="0" anchor="ctr"/>
           <a:lstStyle/>
           <a:p>
-            <a:pPr indent="0" marL="0">
+            <a:pPr marL="0" indent="0">
               <a:buNone/>
             </a:pPr>
             <a:r>
@@ -7300,7 +7274,7 @@
           <a:bodyPr wrap="square" lIns="0" tIns="0" rIns="0" bIns="0" rtlCol="0" anchor="ctr"/>
           <a:lstStyle/>
           <a:p>
-            <a:pPr indent="0" marL="0">
+            <a:pPr marL="0" indent="0">
               <a:buNone/>
             </a:pPr>
             <a:r>
@@ -7364,7 +7338,7 @@
           <a:bodyPr wrap="square" lIns="0" tIns="0" rIns="0" bIns="0" rtlCol="0" anchor="ctr"/>
           <a:lstStyle/>
           <a:p>
-            <a:pPr algn="ctr" indent="0" marL="0">
+            <a:pPr marL="0" indent="0" algn="ctr">
               <a:buNone/>
             </a:pPr>
             <a:r>
@@ -7398,6 +7372,7 @@
         <a:solidFill>
           <a:srgbClr val="F1F5F9"/>
         </a:solidFill>
+        <a:effectLst/>
       </p:bgPr>
     </p:bg>
     <p:spTree>
@@ -7460,7 +7435,7 @@
           <a:bodyPr wrap="square" lIns="0" tIns="0" rIns="0" bIns="0" rtlCol="0" anchor="ctr"/>
           <a:lstStyle/>
           <a:p>
-            <a:pPr indent="0" marL="0">
+            <a:pPr marL="0" indent="0">
               <a:buNone/>
             </a:pPr>
             <a:r>
@@ -7526,7 +7501,7 @@
           <a:bodyPr wrap="square" lIns="0" tIns="0" rIns="0" bIns="0" rtlCol="0" anchor="ctr"/>
           <a:lstStyle/>
           <a:p>
-            <a:pPr algn="ctr" indent="0" marL="0">
+            <a:pPr marL="0" indent="0" algn="ctr">
               <a:buNone/>
             </a:pPr>
             <a:r>
@@ -7570,7 +7545,7 @@
             <a:prstDash val="solid"/>
           </a:ln>
           <a:effectLst>
-            <a:outerShdw sx="100000" sy="100000" kx="0" ky="0" algn="bl" rotWithShape="0" blurRad="76200" dist="38100" dir="2700000">
+            <a:outerShdw blurRad="76200" dist="38100" dir="2700000" algn="bl" rotWithShape="0">
               <a:srgbClr val="000000">
                 <a:alpha val="10000"/>
               </a:srgbClr>
@@ -7626,7 +7601,7 @@
           <a:bodyPr wrap="square" lIns="0" tIns="0" rIns="0" bIns="0" rtlCol="0" anchor="ctr"/>
           <a:lstStyle/>
           <a:p>
-            <a:pPr algn="ctr" indent="0" marL="0">
+            <a:pPr marL="0" indent="0" algn="ctr">
               <a:buNone/>
             </a:pPr>
             <a:r>
@@ -7665,7 +7640,7 @@
           <a:bodyPr wrap="square" lIns="0" tIns="0" rIns="0" bIns="0" rtlCol="0" anchor="ctr"/>
           <a:lstStyle/>
           <a:p>
-            <a:pPr indent="0" marL="0">
+            <a:pPr marL="0" indent="0">
               <a:buNone/>
             </a:pPr>
             <a:r>
@@ -7729,7 +7704,7 @@
           <a:bodyPr wrap="square" lIns="0" tIns="0" rIns="0" bIns="0" rtlCol="0" anchor="ctr"/>
           <a:lstStyle/>
           <a:p>
-            <a:pPr algn="ctr" indent="0" marL="0">
+            <a:pPr marL="0" indent="0" algn="ctr">
               <a:buNone/>
             </a:pPr>
             <a:r>
@@ -7768,7 +7743,7 @@
           <a:bodyPr wrap="square" lIns="0" tIns="0" rIns="0" bIns="0" rtlCol="0" anchor="ctr"/>
           <a:lstStyle/>
           <a:p>
-            <a:pPr indent="0" marL="0">
+            <a:pPr marL="0" indent="0">
               <a:buNone/>
             </a:pPr>
             <a:r>
@@ -7832,7 +7807,7 @@
           <a:bodyPr wrap="square" lIns="0" tIns="0" rIns="0" bIns="0" rtlCol="0" anchor="ctr"/>
           <a:lstStyle/>
           <a:p>
-            <a:pPr algn="ctr" indent="0" marL="0">
+            <a:pPr marL="0" indent="0" algn="ctr">
               <a:buNone/>
             </a:pPr>
             <a:r>
@@ -7871,7 +7846,7 @@
           <a:bodyPr wrap="square" lIns="0" tIns="0" rIns="0" bIns="0" rtlCol="0" anchor="ctr"/>
           <a:lstStyle/>
           <a:p>
-            <a:pPr indent="0" marL="0">
+            <a:pPr marL="0" indent="0">
               <a:buNone/>
             </a:pPr>
             <a:r>
@@ -7935,7 +7910,7 @@
           <a:bodyPr wrap="square" lIns="0" tIns="0" rIns="0" bIns="0" rtlCol="0" anchor="ctr"/>
           <a:lstStyle/>
           <a:p>
-            <a:pPr algn="ctr" indent="0" marL="0">
+            <a:pPr marL="0" indent="0" algn="ctr">
               <a:buNone/>
             </a:pPr>
             <a:r>
@@ -7974,7 +7949,7 @@
           <a:bodyPr wrap="square" lIns="0" tIns="0" rIns="0" bIns="0" rtlCol="0" anchor="ctr"/>
           <a:lstStyle/>
           <a:p>
-            <a:pPr indent="0" marL="0">
+            <a:pPr marL="0" indent="0">
               <a:buNone/>
             </a:pPr>
             <a:r>
@@ -8038,7 +8013,7 @@
           <a:bodyPr wrap="square" lIns="0" tIns="0" rIns="0" bIns="0" rtlCol="0" anchor="ctr"/>
           <a:lstStyle/>
           <a:p>
-            <a:pPr algn="ctr" indent="0" marL="0">
+            <a:pPr marL="0" indent="0" algn="ctr">
               <a:buNone/>
             </a:pPr>
             <a:r>
@@ -8077,7 +8052,7 @@
           <a:bodyPr wrap="square" lIns="0" tIns="0" rIns="0" bIns="0" rtlCol="0" anchor="ctr"/>
           <a:lstStyle/>
           <a:p>
-            <a:pPr indent="0" marL="0">
+            <a:pPr marL="0" indent="0">
               <a:buNone/>
             </a:pPr>
             <a:r>
@@ -8121,7 +8096,7 @@
             <a:prstDash val="solid"/>
           </a:ln>
           <a:effectLst>
-            <a:outerShdw sx="100000" sy="100000" kx="0" ky="0" algn="bl" rotWithShape="0" blurRad="76200" dist="38100" dir="2700000">
+            <a:outerShdw blurRad="76200" dist="38100" dir="2700000" algn="bl" rotWithShape="0">
               <a:srgbClr val="000000">
                 <a:alpha val="10000"/>
               </a:srgbClr>
@@ -8177,7 +8152,7 @@
           <a:bodyPr wrap="square" lIns="0" tIns="0" rIns="0" bIns="0" rtlCol="0" anchor="ctr"/>
           <a:lstStyle/>
           <a:p>
-            <a:pPr algn="ctr" indent="0" marL="0">
+            <a:pPr marL="0" indent="0" algn="ctr">
               <a:buNone/>
             </a:pPr>
             <a:r>
@@ -8216,7 +8191,7 @@
           <a:bodyPr wrap="square" lIns="0" tIns="0" rIns="0" bIns="0" rtlCol="0" anchor="ctr"/>
           <a:lstStyle/>
           <a:p>
-            <a:pPr indent="0" marL="0">
+            <a:pPr marL="0" indent="0">
               <a:buNone/>
             </a:pPr>
             <a:r>
@@ -8280,7 +8255,7 @@
           <a:bodyPr wrap="square" lIns="0" tIns="0" rIns="0" bIns="0" rtlCol="0" anchor="ctr"/>
           <a:lstStyle/>
           <a:p>
-            <a:pPr algn="ctr" indent="0" marL="0">
+            <a:pPr marL="0" indent="0" algn="ctr">
               <a:buNone/>
             </a:pPr>
             <a:r>
@@ -8319,7 +8294,7 @@
           <a:bodyPr wrap="square" lIns="0" tIns="0" rIns="0" bIns="0" rtlCol="0" anchor="ctr"/>
           <a:lstStyle/>
           <a:p>
-            <a:pPr indent="0" marL="0">
+            <a:pPr marL="0" indent="0">
               <a:buNone/>
             </a:pPr>
             <a:r>
@@ -8383,7 +8358,7 @@
           <a:bodyPr wrap="square" lIns="0" tIns="0" rIns="0" bIns="0" rtlCol="0" anchor="ctr"/>
           <a:lstStyle/>
           <a:p>
-            <a:pPr algn="ctr" indent="0" marL="0">
+            <a:pPr marL="0" indent="0" algn="ctr">
               <a:buNone/>
             </a:pPr>
             <a:r>
@@ -8422,7 +8397,7 @@
           <a:bodyPr wrap="square" lIns="0" tIns="0" rIns="0" bIns="0" rtlCol="0" anchor="ctr"/>
           <a:lstStyle/>
           <a:p>
-            <a:pPr indent="0" marL="0">
+            <a:pPr marL="0" indent="0">
               <a:buNone/>
             </a:pPr>
             <a:r>
@@ -8486,7 +8461,7 @@
           <a:bodyPr wrap="square" lIns="0" tIns="0" rIns="0" bIns="0" rtlCol="0" anchor="ctr"/>
           <a:lstStyle/>
           <a:p>
-            <a:pPr algn="ctr" indent="0" marL="0">
+            <a:pPr marL="0" indent="0" algn="ctr">
               <a:buNone/>
             </a:pPr>
             <a:r>
@@ -8525,7 +8500,7 @@
           <a:bodyPr wrap="square" lIns="0" tIns="0" rIns="0" bIns="0" rtlCol="0" anchor="ctr"/>
           <a:lstStyle/>
           <a:p>
-            <a:pPr indent="0" marL="0">
+            <a:pPr marL="0" indent="0">
               <a:buNone/>
             </a:pPr>
             <a:r>
@@ -8589,7 +8564,7 @@
           <a:bodyPr wrap="square" lIns="0" tIns="0" rIns="0" bIns="0" rtlCol="0" anchor="ctr"/>
           <a:lstStyle/>
           <a:p>
-            <a:pPr algn="ctr" indent="0" marL="0">
+            <a:pPr marL="0" indent="0" algn="ctr">
               <a:buNone/>
             </a:pPr>
             <a:r>
@@ -8628,7 +8603,7 @@
           <a:bodyPr wrap="square" lIns="0" tIns="0" rIns="0" bIns="0" rtlCol="0" anchor="ctr"/>
           <a:lstStyle/>
           <a:p>
-            <a:pPr indent="0" marL="0">
+            <a:pPr marL="0" indent="0">
               <a:buNone/>
             </a:pPr>
             <a:r>
@@ -8692,7 +8667,7 @@
           <a:bodyPr wrap="square" lIns="0" tIns="0" rIns="0" bIns="0" rtlCol="0" anchor="ctr"/>
           <a:lstStyle/>
           <a:p>
-            <a:pPr algn="ctr" indent="0" marL="0">
+            <a:pPr marL="0" indent="0" algn="ctr">
               <a:buNone/>
             </a:pPr>
             <a:r>
@@ -8731,7 +8706,7 @@
           <a:bodyPr wrap="square" lIns="0" tIns="0" rIns="0" bIns="0" rtlCol="0" anchor="ctr"/>
           <a:lstStyle/>
           <a:p>
-            <a:pPr indent="0" marL="0">
+            <a:pPr marL="0" indent="0">
               <a:buNone/>
             </a:pPr>
             <a:r>
@@ -8775,7 +8750,7 @@
             <a:prstDash val="solid"/>
           </a:ln>
           <a:effectLst>
-            <a:outerShdw sx="100000" sy="100000" kx="0" ky="0" algn="bl" rotWithShape="0" blurRad="76200" dist="38100" dir="2700000">
+            <a:outerShdw blurRad="76200" dist="38100" dir="2700000" algn="bl" rotWithShape="0">
               <a:srgbClr val="000000">
                 <a:alpha val="10000"/>
               </a:srgbClr>
@@ -8804,7 +8779,7 @@
           <a:bodyPr wrap="square" lIns="0" tIns="0" rIns="0" bIns="0" rtlCol="0" anchor="ctr"/>
           <a:lstStyle/>
           <a:p>
-            <a:pPr indent="0" marL="0">
+            <a:pPr marL="0" indent="0">
               <a:buNone/>
             </a:pPr>
             <a:r>
@@ -8831,19 +8806,19 @@
         <p:spPr>
           <a:xfrm>
             <a:off x="457200" y="5367528"/>
-            <a:ext cx="8229600" cy="-118872"/>
-          </a:xfrm>
-          <a:prstGeom prst="rect">
-            <a:avLst/>
-          </a:prstGeom>
-          <a:noFill/>
-          <a:ln/>
-        </p:spPr>
-        <p:txBody>
-          <a:bodyPr wrap="square" lIns="0" tIns="0" rIns="0" bIns="0" rtlCol="0" anchor="ctr"/>
-          <a:lstStyle/>
-          <a:p>
-            <a:pPr indent="0" marL="0">
+            <a:ext cx="8229600" cy="0"/>
+          </a:xfrm>
+          <a:prstGeom prst="rect">
+            <a:avLst/>
+          </a:prstGeom>
+          <a:noFill/>
+          <a:ln/>
+        </p:spPr>
+        <p:txBody>
+          <a:bodyPr wrap="square" lIns="0" tIns="0" rIns="0" bIns="0" rtlCol="0" anchor="ctr"/>
+          <a:lstStyle/>
+          <a:p>
+            <a:pPr marL="0" indent="0">
               <a:buNone/>
             </a:pPr>
             <a:r>
@@ -8907,7 +8882,7 @@
           <a:bodyPr wrap="square" lIns="0" tIns="0" rIns="0" bIns="0" rtlCol="0" anchor="ctr"/>
           <a:lstStyle/>
           <a:p>
-            <a:pPr algn="ctr" indent="0" marL="0">
+            <a:pPr marL="0" indent="0" algn="ctr">
               <a:buNone/>
             </a:pPr>
             <a:r>
@@ -8941,6 +8916,7 @@
         <a:solidFill>
           <a:srgbClr val="0F172A"/>
         </a:solidFill>
+        <a:effectLst/>
       </p:bgPr>
     </p:bg>
     <p:spTree>
@@ -9032,11 +9008,11 @@
           <a:bodyPr wrap="square" lIns="0" tIns="0" rIns="0" bIns="0" rtlCol="0" anchor="ctr"/>
           <a:lstStyle/>
           <a:p>
-            <a:pPr indent="0" marL="0">
-              <a:buNone/>
-            </a:pPr>
-            <a:r>
-              <a:rPr lang="en-US" sz="1200" b="1" spc="400" kern="0" dirty="0">
+            <a:pPr marL="0" indent="0">
+              <a:buNone/>
+            </a:pPr>
+            <a:r>
+              <a:rPr lang="en-US" sz="1200" b="1" kern="0" spc="400" dirty="0">
                 <a:solidFill>
                   <a:srgbClr val="326CE5"/>
                 </a:solidFill>
@@ -9071,7 +9047,7 @@
           <a:bodyPr wrap="square" lIns="0" tIns="0" rIns="0" bIns="0" rtlCol="0" anchor="ctr"/>
           <a:lstStyle/>
           <a:p>
-            <a:pPr indent="0" marL="0">
+            <a:pPr marL="0" indent="0">
               <a:buNone/>
             </a:pPr>
             <a:r>
@@ -9110,7 +9086,7 @@
           <a:bodyPr wrap="square" lIns="0" tIns="0" rIns="0" bIns="0" rtlCol="0" anchor="ctr"/>
           <a:lstStyle/>
           <a:p>
-            <a:pPr indent="0" marL="0">
+            <a:pPr marL="0" indent="0">
               <a:buNone/>
             </a:pPr>
             <a:r>
@@ -9144,6 +9120,7 @@
         <a:solidFill>
           <a:srgbClr val="FFFFFF"/>
         </a:solidFill>
+        <a:effectLst/>
       </p:bgPr>
     </p:bg>
     <p:spTree>
@@ -9206,7 +9183,7 @@
           <a:bodyPr wrap="square" lIns="0" tIns="0" rIns="0" bIns="0" rtlCol="0" anchor="ctr"/>
           <a:lstStyle/>
           <a:p>
-            <a:pPr indent="0" marL="0">
+            <a:pPr marL="0" indent="0">
               <a:buNone/>
             </a:pPr>
             <a:r>
@@ -9272,7 +9249,7 @@
           <a:bodyPr wrap="square" lIns="0" tIns="0" rIns="0" bIns="0" rtlCol="0" anchor="ctr"/>
           <a:lstStyle/>
           <a:p>
-            <a:pPr algn="ctr" indent="0" marL="0">
+            <a:pPr marL="0" indent="0" algn="ctr">
               <a:buNone/>
             </a:pPr>
             <a:r>
@@ -9316,7 +9293,7 @@
             <a:prstDash val="solid"/>
           </a:ln>
           <a:effectLst>
-            <a:outerShdw sx="100000" sy="100000" kx="0" ky="0" algn="bl" rotWithShape="0" blurRad="76200" dist="38100" dir="2700000">
+            <a:outerShdw blurRad="76200" dist="38100" dir="2700000" algn="bl" rotWithShape="0">
               <a:srgbClr val="000000">
                 <a:alpha val="10000"/>
               </a:srgbClr>
@@ -9345,7 +9322,7 @@
           <a:bodyPr wrap="square" lIns="0" tIns="0" rIns="0" bIns="0" rtlCol="0" anchor="ctr"/>
           <a:lstStyle/>
           <a:p>
-            <a:pPr indent="0" marL="0">
+            <a:pPr marL="0" indent="0">
               <a:buNone/>
             </a:pPr>
             <a:r>
@@ -9389,7 +9366,7 @@
             <a:prstDash val="solid"/>
           </a:ln>
           <a:effectLst>
-            <a:outerShdw sx="100000" sy="100000" kx="0" ky="0" algn="bl" rotWithShape="0" blurRad="76200" dist="38100" dir="2700000">
+            <a:outerShdw blurRad="76200" dist="38100" dir="2700000" algn="bl" rotWithShape="0">
               <a:srgbClr val="000000">
                 <a:alpha val="10000"/>
               </a:srgbClr>
@@ -9418,7 +9395,7 @@
           <a:bodyPr wrap="square" lIns="0" tIns="0" rIns="0" bIns="0" rtlCol="0" anchor="ctr"/>
           <a:lstStyle/>
           <a:p>
-            <a:pPr indent="0" marL="0">
+            <a:pPr marL="0" indent="0">
               <a:buNone/>
             </a:pPr>
             <a:r>
@@ -9457,7 +9434,7 @@
           <a:bodyPr wrap="square" lIns="0" tIns="0" rIns="0" bIns="0" rtlCol="0" anchor="ctr"/>
           <a:lstStyle/>
           <a:p>
-            <a:pPr indent="0" marL="0">
+            <a:pPr marL="0" indent="0">
               <a:buNone/>
             </a:pPr>
             <a:r>
@@ -9496,7 +9473,7 @@
           <a:bodyPr wrap="square" lIns="0" tIns="0" rIns="0" bIns="0" rtlCol="0" anchor="ctr"/>
           <a:lstStyle/>
           <a:p>
-            <a:pPr indent="0" marL="0">
+            <a:pPr marL="0" indent="0">
               <a:buNone/>
             </a:pPr>
             <a:r>
@@ -9535,7 +9512,7 @@
           <a:bodyPr wrap="square" lIns="0" tIns="0" rIns="0" bIns="0" rtlCol="0" anchor="ctr"/>
           <a:lstStyle/>
           <a:p>
-            <a:pPr indent="0" marL="0">
+            <a:pPr marL="0" indent="0">
               <a:buNone/>
             </a:pPr>
             <a:r>
@@ -9574,7 +9551,7 @@
           <a:bodyPr wrap="square" lIns="0" tIns="0" rIns="0" bIns="0" rtlCol="0" anchor="ctr"/>
           <a:lstStyle/>
           <a:p>
-            <a:pPr indent="0" marL="0">
+            <a:pPr marL="0" indent="0">
               <a:buNone/>
             </a:pPr>
             <a:r>
@@ -9613,7 +9590,7 @@
           <a:bodyPr wrap="square" lIns="0" tIns="0" rIns="0" bIns="0" rtlCol="0" anchor="ctr"/>
           <a:lstStyle/>
           <a:p>
-            <a:pPr indent="0" marL="0">
+            <a:pPr marL="0" indent="0">
               <a:buNone/>
             </a:pPr>
             <a:r>
@@ -9652,7 +9629,7 @@
           <a:bodyPr wrap="square" lIns="0" tIns="0" rIns="0" bIns="0" rtlCol="0" anchor="ctr"/>
           <a:lstStyle/>
           <a:p>
-            <a:pPr indent="0" marL="0">
+            <a:pPr marL="0" indent="0">
               <a:buNone/>
             </a:pPr>
             <a:r>
@@ -9691,7 +9668,7 @@
           <a:bodyPr wrap="square" lIns="0" tIns="0" rIns="0" bIns="0" rtlCol="0" anchor="ctr"/>
           <a:lstStyle/>
           <a:p>
-            <a:pPr indent="0" marL="0">
+            <a:pPr marL="0" indent="0">
               <a:buNone/>
             </a:pPr>
             <a:r>
@@ -9730,7 +9707,7 @@
           <a:bodyPr wrap="square" lIns="0" tIns="0" rIns="0" bIns="0" rtlCol="0" anchor="ctr"/>
           <a:lstStyle/>
           <a:p>
-            <a:pPr indent="0" marL="0">
+            <a:pPr marL="0" indent="0">
               <a:buNone/>
             </a:pPr>
             <a:r>
@@ -9769,7 +9746,7 @@
           <a:bodyPr wrap="square" lIns="0" tIns="0" rIns="0" bIns="0" rtlCol="0" anchor="ctr"/>
           <a:lstStyle/>
           <a:p>
-            <a:pPr indent="0" marL="0">
+            <a:pPr marL="0" indent="0">
               <a:buNone/>
             </a:pPr>
             <a:r>
@@ -9808,7 +9785,7 @@
           <a:bodyPr wrap="square" lIns="0" tIns="0" rIns="0" bIns="0" rtlCol="0" anchor="ctr"/>
           <a:lstStyle/>
           <a:p>
-            <a:pPr indent="0" marL="0">
+            <a:pPr marL="0" indent="0">
               <a:buNone/>
             </a:pPr>
             <a:r>
@@ -9847,7 +9824,7 @@
           <a:bodyPr wrap="square" lIns="0" tIns="0" rIns="0" bIns="0" rtlCol="0" anchor="ctr"/>
           <a:lstStyle/>
           <a:p>
-            <a:pPr indent="0" marL="0">
+            <a:pPr marL="0" indent="0">
               <a:buNone/>
             </a:pPr>
             <a:r>
@@ -9886,7 +9863,7 @@
           <a:bodyPr wrap="square" lIns="0" tIns="0" rIns="0" bIns="0" rtlCol="0" anchor="ctr"/>
           <a:lstStyle/>
           <a:p>
-            <a:pPr indent="0" marL="0">
+            <a:pPr marL="0" indent="0">
               <a:buNone/>
             </a:pPr>
             <a:r>
@@ -9925,7 +9902,7 @@
           <a:bodyPr wrap="square" lIns="0" tIns="0" rIns="0" bIns="0" rtlCol="0" anchor="ctr"/>
           <a:lstStyle/>
           <a:p>
-            <a:pPr indent="0" marL="0">
+            <a:pPr marL="0" indent="0">
               <a:buNone/>
             </a:pPr>
             <a:r>
@@ -9969,7 +9946,7 @@
             <a:prstDash val="solid"/>
           </a:ln>
           <a:effectLst>
-            <a:outerShdw sx="100000" sy="100000" kx="0" ky="0" algn="bl" rotWithShape="0" blurRad="76200" dist="38100" dir="2700000">
+            <a:outerShdw blurRad="76200" dist="38100" dir="2700000" algn="bl" rotWithShape="0">
               <a:srgbClr val="000000">
                 <a:alpha val="10000"/>
               </a:srgbClr>
@@ -9998,7 +9975,7 @@
           <a:bodyPr wrap="square" lIns="0" tIns="0" rIns="0" bIns="0" rtlCol="0" anchor="ctr"/>
           <a:lstStyle/>
           <a:p>
-            <a:pPr indent="0" marL="0">
+            <a:pPr marL="0" indent="0">
               <a:buNone/>
             </a:pPr>
             <a:r>
@@ -10037,7 +10014,7 @@
           <a:bodyPr wrap="square" lIns="0" tIns="0" rIns="0" bIns="0" rtlCol="0" anchor="ctr"/>
           <a:lstStyle/>
           <a:p>
-            <a:pPr indent="0" marL="0">
+            <a:pPr marL="0" indent="0">
               <a:buNone/>
             </a:pPr>
             <a:r>
@@ -10081,7 +10058,7 @@
             <a:prstDash val="solid"/>
           </a:ln>
           <a:effectLst>
-            <a:outerShdw sx="100000" sy="100000" kx="0" ky="0" algn="bl" rotWithShape="0" blurRad="76200" dist="38100" dir="2700000">
+            <a:outerShdw blurRad="76200" dist="38100" dir="2700000" algn="bl" rotWithShape="0">
               <a:srgbClr val="000000">
                 <a:alpha val="10000"/>
               </a:srgbClr>
@@ -10110,7 +10087,7 @@
           <a:bodyPr wrap="square" lIns="0" tIns="0" rIns="0" bIns="0" rtlCol="0" anchor="ctr"/>
           <a:lstStyle/>
           <a:p>
-            <a:pPr indent="0" marL="0">
+            <a:pPr marL="0" indent="0">
               <a:buNone/>
             </a:pPr>
             <a:r>
@@ -10149,7 +10126,7 @@
           <a:bodyPr wrap="square" lIns="0" tIns="0" rIns="0" bIns="0" rtlCol="0" anchor="ctr"/>
           <a:lstStyle/>
           <a:p>
-            <a:pPr indent="0" marL="0">
+            <a:pPr marL="0" indent="0">
               <a:buNone/>
             </a:pPr>
             <a:r>
@@ -10193,7 +10170,7 @@
             <a:prstDash val="solid"/>
           </a:ln>
           <a:effectLst>
-            <a:outerShdw sx="100000" sy="100000" kx="0" ky="0" algn="bl" rotWithShape="0" blurRad="76200" dist="38100" dir="2700000">
+            <a:outerShdw blurRad="76200" dist="38100" dir="2700000" algn="bl" rotWithShape="0">
               <a:srgbClr val="000000">
                 <a:alpha val="10000"/>
               </a:srgbClr>
@@ -10222,7 +10199,7 @@
           <a:bodyPr wrap="square" lIns="0" tIns="0" rIns="0" bIns="0" rtlCol="0" anchor="ctr"/>
           <a:lstStyle/>
           <a:p>
-            <a:pPr indent="0" marL="0">
+            <a:pPr marL="0" indent="0">
               <a:buNone/>
             </a:pPr>
             <a:r>
@@ -10261,7 +10238,7 @@
           <a:bodyPr wrap="square" lIns="0" tIns="0" rIns="0" bIns="0" rtlCol="0" anchor="ctr"/>
           <a:lstStyle/>
           <a:p>
-            <a:pPr indent="0" marL="0">
+            <a:pPr marL="0" indent="0">
               <a:buNone/>
             </a:pPr>
             <a:r>
@@ -10305,7 +10282,7 @@
             <a:prstDash val="solid"/>
           </a:ln>
           <a:effectLst>
-            <a:outerShdw sx="100000" sy="100000" kx="0" ky="0" algn="bl" rotWithShape="0" blurRad="76200" dist="38100" dir="2700000">
+            <a:outerShdw blurRad="76200" dist="38100" dir="2700000" algn="bl" rotWithShape="0">
               <a:srgbClr val="000000">
                 <a:alpha val="10000"/>
               </a:srgbClr>
@@ -10334,7 +10311,7 @@
           <a:bodyPr wrap="square" lIns="0" tIns="0" rIns="0" bIns="0" rtlCol="0" anchor="ctr"/>
           <a:lstStyle/>
           <a:p>
-            <a:pPr indent="0" marL="0">
+            <a:pPr marL="0" indent="0">
               <a:buNone/>
             </a:pPr>
             <a:r>
@@ -10373,7 +10350,7 @@
           <a:bodyPr wrap="square" lIns="0" tIns="0" rIns="0" bIns="0" rtlCol="0" anchor="ctr"/>
           <a:lstStyle/>
           <a:p>
-            <a:pPr indent="0" marL="0">
+            <a:pPr marL="0" indent="0">
               <a:buNone/>
             </a:pPr>
             <a:r>
@@ -10437,7 +10414,7 @@
           <a:bodyPr wrap="square" lIns="0" tIns="0" rIns="0" bIns="0" rtlCol="0" anchor="ctr"/>
           <a:lstStyle/>
           <a:p>
-            <a:pPr algn="ctr" indent="0" marL="0">
+            <a:pPr marL="0" indent="0" algn="ctr">
               <a:buNone/>
             </a:pPr>
             <a:r>
@@ -10471,6 +10448,7 @@
         <a:solidFill>
           <a:srgbClr val="FFFFFF"/>
         </a:solidFill>
+        <a:effectLst/>
       </p:bgPr>
     </p:bg>
     <p:spTree>
@@ -10533,7 +10511,7 @@
           <a:bodyPr wrap="square" lIns="0" tIns="0" rIns="0" bIns="0" rtlCol="0" anchor="ctr"/>
           <a:lstStyle/>
           <a:p>
-            <a:pPr indent="0" marL="0">
+            <a:pPr marL="0" indent="0">
               <a:buNone/>
             </a:pPr>
             <a:r>
@@ -10599,7 +10577,7 @@
           <a:bodyPr wrap="square" lIns="0" tIns="0" rIns="0" bIns="0" rtlCol="0" anchor="ctr"/>
           <a:lstStyle/>
           <a:p>
-            <a:pPr algn="ctr" indent="0" marL="0">
+            <a:pPr marL="0" indent="0" algn="ctr">
               <a:buNone/>
             </a:pPr>
             <a:r>
@@ -10643,7 +10621,7 @@
             <a:prstDash val="solid"/>
           </a:ln>
           <a:effectLst>
-            <a:outerShdw sx="100000" sy="100000" kx="0" ky="0" algn="bl" rotWithShape="0" blurRad="76200" dist="38100" dir="2700000">
+            <a:outerShdw blurRad="76200" dist="38100" dir="2700000" algn="bl" rotWithShape="0">
               <a:srgbClr val="000000">
                 <a:alpha val="10000"/>
               </a:srgbClr>
@@ -10672,7 +10650,7 @@
           <a:bodyPr wrap="square" lIns="0" tIns="0" rIns="0" bIns="0" rtlCol="0" anchor="ctr"/>
           <a:lstStyle/>
           <a:p>
-            <a:pPr indent="0" marL="0">
+            <a:pPr marL="0" indent="0">
               <a:buNone/>
             </a:pPr>
             <a:r>
@@ -10716,7 +10694,7 @@
             <a:prstDash val="solid"/>
           </a:ln>
           <a:effectLst>
-            <a:outerShdw sx="100000" sy="100000" kx="0" ky="0" algn="bl" rotWithShape="0" blurRad="76200" dist="38100" dir="2700000">
+            <a:outerShdw blurRad="76200" dist="38100" dir="2700000" algn="bl" rotWithShape="0">
               <a:srgbClr val="000000">
                 <a:alpha val="10000"/>
               </a:srgbClr>
@@ -10772,7 +10750,7 @@
           <a:bodyPr wrap="square" lIns="0" tIns="0" rIns="0" bIns="0" rtlCol="0" anchor="ctr"/>
           <a:lstStyle/>
           <a:p>
-            <a:pPr algn="ctr" indent="0" marL="0">
+            <a:pPr marL="0" indent="0" algn="ctr">
               <a:buNone/>
             </a:pPr>
             <a:r>
@@ -10811,7 +10789,7 @@
           <a:bodyPr wrap="square" lIns="0" tIns="0" rIns="0" bIns="0" rtlCol="0" anchor="ctr"/>
           <a:lstStyle/>
           <a:p>
-            <a:pPr indent="0" marL="0">
+            <a:pPr marL="0" indent="0">
               <a:buNone/>
             </a:pPr>
             <a:r>
@@ -10855,7 +10833,7 @@
             <a:prstDash val="solid"/>
           </a:ln>
           <a:effectLst>
-            <a:outerShdw sx="100000" sy="100000" kx="0" ky="0" algn="bl" rotWithShape="0" blurRad="76200" dist="38100" dir="2700000">
+            <a:outerShdw blurRad="76200" dist="38100" dir="2700000" algn="bl" rotWithShape="0">
               <a:srgbClr val="000000">
                 <a:alpha val="10000"/>
               </a:srgbClr>
@@ -10884,7 +10862,7 @@
           <a:bodyPr wrap="square" lIns="0" tIns="0" rIns="0" bIns="0" rtlCol="0" anchor="ctr"/>
           <a:lstStyle/>
           <a:p>
-            <a:pPr indent="0" marL="0">
+            <a:pPr marL="0" indent="0">
               <a:buNone/>
             </a:pPr>
             <a:r>
@@ -10923,7 +10901,7 @@
           <a:bodyPr wrap="square" lIns="0" tIns="0" rIns="0" bIns="0" rtlCol="0" anchor="ctr"/>
           <a:lstStyle/>
           <a:p>
-            <a:pPr indent="0" marL="0">
+            <a:pPr marL="0" indent="0">
               <a:buNone/>
             </a:pPr>
             <a:r>
@@ -10962,7 +10940,7 @@
           <a:bodyPr wrap="square" lIns="0" tIns="0" rIns="0" bIns="0" rtlCol="0" anchor="ctr"/>
           <a:lstStyle/>
           <a:p>
-            <a:pPr indent="0" marL="0">
+            <a:pPr marL="0" indent="0">
               <a:buNone/>
             </a:pPr>
             <a:r>
@@ -11001,7 +10979,7 @@
           <a:bodyPr wrap="square" lIns="0" tIns="0" rIns="0" bIns="0" rtlCol="0" anchor="ctr"/>
           <a:lstStyle/>
           <a:p>
-            <a:pPr indent="0" marL="0">
+            <a:pPr marL="0" indent="0">
               <a:buNone/>
             </a:pPr>
             <a:r>
@@ -11040,7 +11018,7 @@
           <a:bodyPr wrap="square" lIns="0" tIns="0" rIns="0" bIns="0" rtlCol="0" anchor="ctr"/>
           <a:lstStyle/>
           <a:p>
-            <a:pPr indent="0" marL="0">
+            <a:pPr marL="0" indent="0">
               <a:buNone/>
             </a:pPr>
             <a:r>
@@ -11079,7 +11057,7 @@
           <a:bodyPr wrap="square" lIns="0" tIns="0" rIns="0" bIns="0" rtlCol="0" anchor="ctr"/>
           <a:lstStyle/>
           <a:p>
-            <a:pPr indent="0" marL="0">
+            <a:pPr marL="0" indent="0">
               <a:buNone/>
             </a:pPr>
             <a:r>
@@ -11123,7 +11101,7 @@
             <a:prstDash val="solid"/>
           </a:ln>
           <a:effectLst>
-            <a:outerShdw sx="100000" sy="100000" kx="0" ky="0" algn="bl" rotWithShape="0" blurRad="76200" dist="38100" dir="2700000">
+            <a:outerShdw blurRad="76200" dist="38100" dir="2700000" algn="bl" rotWithShape="0">
               <a:srgbClr val="000000">
                 <a:alpha val="10000"/>
               </a:srgbClr>
@@ -11179,7 +11157,7 @@
           <a:bodyPr wrap="square" lIns="0" tIns="0" rIns="0" bIns="0" rtlCol="0" anchor="ctr"/>
           <a:lstStyle/>
           <a:p>
-            <a:pPr algn="ctr" indent="0" marL="0">
+            <a:pPr marL="0" indent="0" algn="ctr">
               <a:buNone/>
             </a:pPr>
             <a:r>
@@ -11218,7 +11196,7 @@
           <a:bodyPr wrap="square" lIns="0" tIns="0" rIns="0" bIns="0" rtlCol="0" anchor="ctr"/>
           <a:lstStyle/>
           <a:p>
-            <a:pPr indent="0" marL="0">
+            <a:pPr marL="0" indent="0">
               <a:buNone/>
             </a:pPr>
             <a:r>
@@ -11262,7 +11240,7 @@
             <a:prstDash val="solid"/>
           </a:ln>
           <a:effectLst>
-            <a:outerShdw sx="100000" sy="100000" kx="0" ky="0" algn="bl" rotWithShape="0" blurRad="76200" dist="38100" dir="2700000">
+            <a:outerShdw blurRad="76200" dist="38100" dir="2700000" algn="bl" rotWithShape="0">
               <a:srgbClr val="000000">
                 <a:alpha val="10000"/>
               </a:srgbClr>
@@ -11291,7 +11269,7 @@
           <a:bodyPr wrap="square" lIns="0" tIns="0" rIns="0" bIns="0" rtlCol="0" anchor="ctr"/>
           <a:lstStyle/>
           <a:p>
-            <a:pPr indent="0" marL="0">
+            <a:pPr marL="0" indent="0">
               <a:buNone/>
             </a:pPr>
             <a:r>
@@ -11330,7 +11308,7 @@
           <a:bodyPr wrap="square" lIns="0" tIns="0" rIns="0" bIns="0" rtlCol="0" anchor="ctr"/>
           <a:lstStyle/>
           <a:p>
-            <a:pPr indent="0" marL="0">
+            <a:pPr marL="0" indent="0">
               <a:buNone/>
             </a:pPr>
             <a:r>
@@ -11369,7 +11347,7 @@
           <a:bodyPr wrap="square" lIns="0" tIns="0" rIns="0" bIns="0" rtlCol="0" anchor="ctr"/>
           <a:lstStyle/>
           <a:p>
-            <a:pPr indent="0" marL="0">
+            <a:pPr marL="0" indent="0">
               <a:buNone/>
             </a:pPr>
             <a:r>
@@ -11408,7 +11386,7 @@
           <a:bodyPr wrap="square" lIns="0" tIns="0" rIns="0" bIns="0" rtlCol="0" anchor="ctr"/>
           <a:lstStyle/>
           <a:p>
-            <a:pPr indent="0" marL="0">
+            <a:pPr marL="0" indent="0">
               <a:buNone/>
             </a:pPr>
             <a:r>
@@ -11447,7 +11425,7 @@
           <a:bodyPr wrap="square" lIns="0" tIns="0" rIns="0" bIns="0" rtlCol="0" anchor="ctr"/>
           <a:lstStyle/>
           <a:p>
-            <a:pPr indent="0" marL="0">
+            <a:pPr marL="0" indent="0">
               <a:buNone/>
             </a:pPr>
             <a:r>
@@ -11486,7 +11464,7 @@
           <a:bodyPr wrap="square" lIns="0" tIns="0" rIns="0" bIns="0" rtlCol="0" anchor="ctr"/>
           <a:lstStyle/>
           <a:p>
-            <a:pPr indent="0" marL="0">
+            <a:pPr marL="0" indent="0">
               <a:buNone/>
             </a:pPr>
             <a:r>
@@ -11530,7 +11508,7 @@
             <a:prstDash val="solid"/>
           </a:ln>
           <a:effectLst>
-            <a:outerShdw sx="100000" sy="100000" kx="0" ky="0" algn="bl" rotWithShape="0" blurRad="76200" dist="38100" dir="2700000">
+            <a:outerShdw blurRad="76200" dist="38100" dir="2700000" algn="bl" rotWithShape="0">
               <a:srgbClr val="000000">
                 <a:alpha val="10000"/>
               </a:srgbClr>
@@ -11586,7 +11564,7 @@
           <a:bodyPr wrap="square" lIns="0" tIns="0" rIns="0" bIns="0" rtlCol="0" anchor="ctr"/>
           <a:lstStyle/>
           <a:p>
-            <a:pPr algn="ctr" indent="0" marL="0">
+            <a:pPr marL="0" indent="0" algn="ctr">
               <a:buNone/>
             </a:pPr>
             <a:r>
@@ -11625,7 +11603,7 @@
           <a:bodyPr wrap="square" lIns="0" tIns="0" rIns="0" bIns="0" rtlCol="0" anchor="ctr"/>
           <a:lstStyle/>
           <a:p>
-            <a:pPr indent="0" marL="0">
+            <a:pPr marL="0" indent="0">
               <a:buNone/>
             </a:pPr>
             <a:r>
@@ -11669,7 +11647,7 @@
             <a:prstDash val="solid"/>
           </a:ln>
           <a:effectLst>
-            <a:outerShdw sx="100000" sy="100000" kx="0" ky="0" algn="bl" rotWithShape="0" blurRad="76200" dist="38100" dir="2700000">
+            <a:outerShdw blurRad="76200" dist="38100" dir="2700000" algn="bl" rotWithShape="0">
               <a:srgbClr val="000000">
                 <a:alpha val="10000"/>
               </a:srgbClr>
@@ -11698,7 +11676,7 @@
           <a:bodyPr wrap="square" lIns="0" tIns="0" rIns="0" bIns="0" rtlCol="0" anchor="ctr"/>
           <a:lstStyle/>
           <a:p>
-            <a:pPr indent="0" marL="0">
+            <a:pPr marL="0" indent="0">
               <a:buNone/>
             </a:pPr>
             <a:r>
@@ -11737,7 +11715,7 @@
           <a:bodyPr wrap="square" lIns="0" tIns="0" rIns="0" bIns="0" rtlCol="0" anchor="ctr"/>
           <a:lstStyle/>
           <a:p>
-            <a:pPr indent="0" marL="0">
+            <a:pPr marL="0" indent="0">
               <a:buNone/>
             </a:pPr>
             <a:r>
@@ -11776,7 +11754,7 @@
           <a:bodyPr wrap="square" lIns="0" tIns="0" rIns="0" bIns="0" rtlCol="0" anchor="ctr"/>
           <a:lstStyle/>
           <a:p>
-            <a:pPr indent="0" marL="0">
+            <a:pPr marL="0" indent="0">
               <a:buNone/>
             </a:pPr>
             <a:r>
@@ -11815,7 +11793,7 @@
           <a:bodyPr wrap="square" lIns="0" tIns="0" rIns="0" bIns="0" rtlCol="0" anchor="ctr"/>
           <a:lstStyle/>
           <a:p>
-            <a:pPr indent="0" marL="0">
+            <a:pPr marL="0" indent="0">
               <a:buNone/>
             </a:pPr>
             <a:r>
@@ -11854,7 +11832,7 @@
           <a:bodyPr wrap="square" lIns="0" tIns="0" rIns="0" bIns="0" rtlCol="0" anchor="ctr"/>
           <a:lstStyle/>
           <a:p>
-            <a:pPr indent="0" marL="0">
+            <a:pPr marL="0" indent="0">
               <a:buNone/>
             </a:pPr>
             <a:r>
@@ -11893,7 +11871,7 @@
           <a:bodyPr wrap="square" lIns="0" tIns="0" rIns="0" bIns="0" rtlCol="0" anchor="ctr"/>
           <a:lstStyle/>
           <a:p>
-            <a:pPr indent="0" marL="0">
+            <a:pPr marL="0" indent="0">
               <a:buNone/>
             </a:pPr>
             <a:r>
@@ -11957,7 +11935,7 @@
           <a:bodyPr wrap="square" lIns="0" tIns="0" rIns="0" bIns="0" rtlCol="0" anchor="ctr"/>
           <a:lstStyle/>
           <a:p>
-            <a:pPr algn="ctr" indent="0" marL="0">
+            <a:pPr marL="0" indent="0" algn="ctr">
               <a:buNone/>
             </a:pPr>
             <a:r>
@@ -11991,6 +11969,7 @@
         <a:solidFill>
           <a:srgbClr val="0F172A"/>
         </a:solidFill>
+        <a:effectLst/>
       </p:bgPr>
     </p:bg>
     <p:spTree>
@@ -12082,11 +12061,11 @@
           <a:bodyPr wrap="square" lIns="0" tIns="0" rIns="0" bIns="0" rtlCol="0" anchor="ctr"/>
           <a:lstStyle/>
           <a:p>
-            <a:pPr indent="0" marL="0">
-              <a:buNone/>
-            </a:pPr>
-            <a:r>
-              <a:rPr lang="en-US" sz="1200" b="1" spc="400" kern="0" dirty="0">
+            <a:pPr marL="0" indent="0">
+              <a:buNone/>
+            </a:pPr>
+            <a:r>
+              <a:rPr lang="en-US" sz="1200" b="1" kern="0" spc="400" dirty="0">
                 <a:solidFill>
                   <a:srgbClr val="326CE5"/>
                 </a:solidFill>
@@ -12121,7 +12100,7 @@
           <a:bodyPr wrap="square" lIns="0" tIns="0" rIns="0" bIns="0" rtlCol="0" anchor="ctr"/>
           <a:lstStyle/>
           <a:p>
-            <a:pPr indent="0" marL="0">
+            <a:pPr marL="0" indent="0">
               <a:buNone/>
             </a:pPr>
             <a:r>
@@ -12160,7 +12139,7 @@
           <a:bodyPr wrap="square" lIns="0" tIns="0" rIns="0" bIns="0" rtlCol="0" anchor="ctr"/>
           <a:lstStyle/>
           <a:p>
-            <a:pPr indent="0" marL="0">
+            <a:pPr marL="0" indent="0">
               <a:buNone/>
             </a:pPr>
             <a:r>
@@ -12194,6 +12173,7 @@
         <a:solidFill>
           <a:srgbClr val="FFFFFF"/>
         </a:solidFill>
+        <a:effectLst/>
       </p:bgPr>
     </p:bg>
     <p:spTree>
@@ -12256,7 +12236,7 @@
           <a:bodyPr wrap="square" lIns="0" tIns="0" rIns="0" bIns="0" rtlCol="0" anchor="ctr"/>
           <a:lstStyle/>
           <a:p>
-            <a:pPr indent="0" marL="0">
+            <a:pPr marL="0" indent="0">
               <a:buNone/>
             </a:pPr>
             <a:r>
@@ -12322,7 +12302,7 @@
           <a:bodyPr wrap="square" lIns="0" tIns="0" rIns="0" bIns="0" rtlCol="0" anchor="ctr"/>
           <a:lstStyle/>
           <a:p>
-            <a:pPr algn="ctr" indent="0" marL="0">
+            <a:pPr marL="0" indent="0" algn="ctr">
               <a:buNone/>
             </a:pPr>
             <a:r>
@@ -12366,7 +12346,7 @@
             <a:prstDash val="solid"/>
           </a:ln>
           <a:effectLst>
-            <a:outerShdw sx="100000" sy="100000" kx="0" ky="0" algn="bl" rotWithShape="0" blurRad="76200" dist="38100" dir="2700000">
+            <a:outerShdw blurRad="76200" dist="38100" dir="2700000" algn="bl" rotWithShape="0">
               <a:srgbClr val="000000">
                 <a:alpha val="10000"/>
               </a:srgbClr>
@@ -12395,7 +12375,7 @@
           <a:bodyPr wrap="square" lIns="0" tIns="0" rIns="0" bIns="0" rtlCol="0" anchor="ctr"/>
           <a:lstStyle/>
           <a:p>
-            <a:pPr indent="0" marL="0">
+            <a:pPr marL="0" indent="0">
               <a:buNone/>
             </a:pPr>
             <a:r>
@@ -12439,7 +12419,7 @@
             <a:prstDash val="solid"/>
           </a:ln>
           <a:effectLst>
-            <a:outerShdw sx="100000" sy="100000" kx="0" ky="0" algn="bl" rotWithShape="0" blurRad="76200" dist="38100" dir="2700000">
+            <a:outerShdw blurRad="76200" dist="38100" dir="2700000" algn="bl" rotWithShape="0">
               <a:srgbClr val="000000">
                 <a:alpha val="10000"/>
               </a:srgbClr>
@@ -12468,7 +12448,7 @@
           <a:bodyPr wrap="square" lIns="0" tIns="0" rIns="0" bIns="0" rtlCol="0" anchor="ctr"/>
           <a:lstStyle/>
           <a:p>
-            <a:pPr indent="0" marL="0">
+            <a:pPr marL="0" indent="0">
               <a:buNone/>
             </a:pPr>
             <a:r>
@@ -12507,7 +12487,7 @@
           <a:bodyPr wrap="square" lIns="0" tIns="0" rIns="0" bIns="0" rtlCol="0" anchor="ctr"/>
           <a:lstStyle/>
           <a:p>
-            <a:pPr indent="0" marL="0">
+            <a:pPr marL="0" indent="0">
               <a:buNone/>
             </a:pPr>
             <a:r>
@@ -12546,7 +12526,7 @@
           <a:bodyPr wrap="square" lIns="0" tIns="0" rIns="0" bIns="0" rtlCol="0" anchor="ctr"/>
           <a:lstStyle/>
           <a:p>
-            <a:pPr indent="0" marL="0">
+            <a:pPr marL="0" indent="0">
               <a:buNone/>
             </a:pPr>
             <a:r>
@@ -12585,7 +12565,7 @@
           <a:bodyPr wrap="square" lIns="0" tIns="0" rIns="0" bIns="0" rtlCol="0" anchor="ctr"/>
           <a:lstStyle/>
           <a:p>
-            <a:pPr indent="0" marL="0">
+            <a:pPr marL="0" indent="0">
               <a:buNone/>
             </a:pPr>
             <a:r>
@@ -12624,7 +12604,7 @@
           <a:bodyPr wrap="square" lIns="0" tIns="0" rIns="0" bIns="0" rtlCol="0" anchor="ctr"/>
           <a:lstStyle/>
           <a:p>
-            <a:pPr indent="0" marL="0">
+            <a:pPr marL="0" indent="0">
               <a:buNone/>
             </a:pPr>
             <a:r>
@@ -12663,7 +12643,7 @@
           <a:bodyPr wrap="square" lIns="0" tIns="0" rIns="0" bIns="0" rtlCol="0" anchor="ctr"/>
           <a:lstStyle/>
           <a:p>
-            <a:pPr indent="0" marL="0">
+            <a:pPr marL="0" indent="0">
               <a:buNone/>
             </a:pPr>
             <a:r>
@@ -12702,7 +12682,7 @@
           <a:bodyPr wrap="square" lIns="0" tIns="0" rIns="0" bIns="0" rtlCol="0" anchor="ctr"/>
           <a:lstStyle/>
           <a:p>
-            <a:pPr indent="0" marL="0">
+            <a:pPr marL="0" indent="0">
               <a:buNone/>
             </a:pPr>
             <a:r>
@@ -12741,7 +12721,7 @@
           <a:bodyPr wrap="square" lIns="0" tIns="0" rIns="0" bIns="0" rtlCol="0" anchor="ctr"/>
           <a:lstStyle/>
           <a:p>
-            <a:pPr indent="0" marL="0">
+            <a:pPr marL="0" indent="0">
               <a:buNone/>
             </a:pPr>
             <a:r>
@@ -12780,7 +12760,7 @@
           <a:bodyPr wrap="square" lIns="0" tIns="0" rIns="0" bIns="0" rtlCol="0" anchor="ctr"/>
           <a:lstStyle/>
           <a:p>
-            <a:pPr indent="0" marL="0">
+            <a:pPr marL="0" indent="0">
               <a:buNone/>
             </a:pPr>
             <a:r>
@@ -12819,7 +12799,7 @@
           <a:bodyPr wrap="square" lIns="0" tIns="0" rIns="0" bIns="0" rtlCol="0" anchor="ctr"/>
           <a:lstStyle/>
           <a:p>
-            <a:pPr indent="0" marL="0">
+            <a:pPr marL="0" indent="0">
               <a:buNone/>
             </a:pPr>
             <a:r>
@@ -12858,7 +12838,7 @@
           <a:bodyPr wrap="square" lIns="0" tIns="0" rIns="0" bIns="0" rtlCol="0" anchor="ctr"/>
           <a:lstStyle/>
           <a:p>
-            <a:pPr indent="0" marL="0">
+            <a:pPr marL="0" indent="0">
               <a:buNone/>
             </a:pPr>
             <a:r>
@@ -12897,7 +12877,7 @@
           <a:bodyPr wrap="square" lIns="0" tIns="0" rIns="0" bIns="0" rtlCol="0" anchor="ctr"/>
           <a:lstStyle/>
           <a:p>
-            <a:pPr indent="0" marL="0">
+            <a:pPr marL="0" indent="0">
               <a:buNone/>
             </a:pPr>
             <a:r>
@@ -12936,7 +12916,7 @@
           <a:bodyPr wrap="square" lIns="0" tIns="0" rIns="0" bIns="0" rtlCol="0" anchor="ctr"/>
           <a:lstStyle/>
           <a:p>
-            <a:pPr indent="0" marL="0">
+            <a:pPr marL="0" indent="0">
               <a:buNone/>
             </a:pPr>
             <a:r>
@@ -12975,7 +12955,7 @@
           <a:bodyPr wrap="square" lIns="0" tIns="0" rIns="0" bIns="0" rtlCol="0" anchor="ctr"/>
           <a:lstStyle/>
           <a:p>
-            <a:pPr indent="0" marL="0">
+            <a:pPr marL="0" indent="0">
               <a:buNone/>
             </a:pPr>
             <a:r>
@@ -13019,7 +12999,7 @@
             <a:prstDash val="solid"/>
           </a:ln>
           <a:effectLst>
-            <a:outerShdw sx="100000" sy="100000" kx="0" ky="0" algn="bl" rotWithShape="0" blurRad="76200" dist="38100" dir="2700000">
+            <a:outerShdw blurRad="76200" dist="38100" dir="2700000" algn="bl" rotWithShape="0">
               <a:srgbClr val="000000">
                 <a:alpha val="10000"/>
               </a:srgbClr>
@@ -13075,7 +13055,7 @@
           <a:bodyPr wrap="square" lIns="0" tIns="0" rIns="0" bIns="0" rtlCol="0" anchor="ctr"/>
           <a:lstStyle/>
           <a:p>
-            <a:pPr algn="ctr" indent="0" marL="0">
+            <a:pPr marL="0" indent="0" algn="ctr">
               <a:buNone/>
             </a:pPr>
             <a:r>
@@ -13119,7 +13099,7 @@
             <a:prstDash val="solid"/>
           </a:ln>
           <a:effectLst>
-            <a:outerShdw sx="100000" sy="100000" kx="0" ky="0" algn="bl" rotWithShape="0" blurRad="76200" dist="38100" dir="2700000">
+            <a:outerShdw blurRad="76200" dist="38100" dir="2700000" algn="bl" rotWithShape="0">
               <a:srgbClr val="000000">
                 <a:alpha val="10000"/>
               </a:srgbClr>
@@ -13148,7 +13128,7 @@
           <a:bodyPr wrap="square" lIns="0" tIns="0" rIns="0" bIns="0" rtlCol="0" anchor="ctr"/>
           <a:lstStyle/>
           <a:p>
-            <a:pPr indent="0" marL="0">
+            <a:pPr marL="0" indent="0">
               <a:buNone/>
             </a:pPr>
             <a:r>
@@ -13187,7 +13167,7 @@
           <a:bodyPr wrap="square" lIns="0" tIns="0" rIns="0" bIns="0" rtlCol="0" anchor="ctr"/>
           <a:lstStyle/>
           <a:p>
-            <a:pPr indent="0" marL="0">
+            <a:pPr marL="0" indent="0">
               <a:buNone/>
             </a:pPr>
             <a:r>
@@ -13226,7 +13206,7 @@
           <a:bodyPr wrap="square" lIns="0" tIns="0" rIns="0" bIns="0" rtlCol="0" anchor="ctr"/>
           <a:lstStyle/>
           <a:p>
-            <a:pPr indent="0" marL="0">
+            <a:pPr marL="0" indent="0">
               <a:buNone/>
             </a:pPr>
             <a:r>
@@ -13265,7 +13245,7 @@
           <a:bodyPr wrap="square" lIns="0" tIns="0" rIns="0" bIns="0" rtlCol="0" anchor="ctr"/>
           <a:lstStyle/>
           <a:p>
-            <a:pPr indent="0" marL="0">
+            <a:pPr marL="0" indent="0">
               <a:buNone/>
             </a:pPr>
             <a:r>
@@ -13304,7 +13284,7 @@
           <a:bodyPr wrap="square" lIns="0" tIns="0" rIns="0" bIns="0" rtlCol="0" anchor="ctr"/>
           <a:lstStyle/>
           <a:p>
-            <a:pPr indent="0" marL="0">
+            <a:pPr marL="0" indent="0">
               <a:buNone/>
             </a:pPr>
             <a:r>
@@ -13343,7 +13323,7 @@
           <a:bodyPr wrap="square" lIns="0" tIns="0" rIns="0" bIns="0" rtlCol="0" anchor="ctr"/>
           <a:lstStyle/>
           <a:p>
-            <a:pPr indent="0" marL="0">
+            <a:pPr marL="0" indent="0">
               <a:buNone/>
             </a:pPr>
             <a:r>
@@ -13387,7 +13367,7 @@
             <a:prstDash val="solid"/>
           </a:ln>
           <a:effectLst>
-            <a:outerShdw sx="100000" sy="100000" kx="0" ky="0" algn="bl" rotWithShape="0" blurRad="76200" dist="38100" dir="2700000">
+            <a:outerShdw blurRad="76200" dist="38100" dir="2700000" algn="bl" rotWithShape="0">
               <a:srgbClr val="000000">
                 <a:alpha val="10000"/>
               </a:srgbClr>
@@ -13443,7 +13423,7 @@
           <a:bodyPr wrap="square" lIns="0" tIns="0" rIns="0" bIns="0" rtlCol="0" anchor="ctr"/>
           <a:lstStyle/>
           <a:p>
-            <a:pPr algn="ctr" indent="0" marL="0">
+            <a:pPr marL="0" indent="0" algn="ctr">
               <a:buNone/>
             </a:pPr>
             <a:r>
@@ -13487,7 +13467,7 @@
             <a:prstDash val="solid"/>
           </a:ln>
           <a:effectLst>
-            <a:outerShdw sx="100000" sy="100000" kx="0" ky="0" algn="bl" rotWithShape="0" blurRad="76200" dist="38100" dir="2700000">
+            <a:outerShdw blurRad="76200" dist="38100" dir="2700000" algn="bl" rotWithShape="0">
               <a:srgbClr val="000000">
                 <a:alpha val="10000"/>
               </a:srgbClr>
@@ -13516,7 +13496,7 @@
           <a:bodyPr wrap="square" lIns="0" tIns="0" rIns="0" bIns="0" rtlCol="0" anchor="ctr"/>
           <a:lstStyle/>
           <a:p>
-            <a:pPr indent="0" marL="0">
+            <a:pPr marL="0" indent="0">
               <a:buNone/>
             </a:pPr>
             <a:r>
@@ -13555,7 +13535,7 @@
           <a:bodyPr wrap="square" lIns="0" tIns="0" rIns="0" bIns="0" rtlCol="0" anchor="ctr"/>
           <a:lstStyle/>
           <a:p>
-            <a:pPr indent="0" marL="0">
+            <a:pPr marL="0" indent="0">
               <a:buNone/>
             </a:pPr>
             <a:r>
@@ -13594,7 +13574,7 @@
           <a:bodyPr wrap="square" lIns="0" tIns="0" rIns="0" bIns="0" rtlCol="0" anchor="ctr"/>
           <a:lstStyle/>
           <a:p>
-            <a:pPr indent="0" marL="0">
+            <a:pPr marL="0" indent="0">
               <a:buNone/>
             </a:pPr>
             <a:r>
@@ -13633,7 +13613,7 @@
           <a:bodyPr wrap="square" lIns="0" tIns="0" rIns="0" bIns="0" rtlCol="0" anchor="ctr"/>
           <a:lstStyle/>
           <a:p>
-            <a:pPr indent="0" marL="0">
+            <a:pPr marL="0" indent="0">
               <a:buNone/>
             </a:pPr>
             <a:r>
@@ -13672,7 +13652,7 @@
           <a:bodyPr wrap="square" lIns="0" tIns="0" rIns="0" bIns="0" rtlCol="0" anchor="ctr"/>
           <a:lstStyle/>
           <a:p>
-            <a:pPr indent="0" marL="0">
+            <a:pPr marL="0" indent="0">
               <a:buNone/>
             </a:pPr>
             <a:r>
@@ -13711,7 +13691,7 @@
           <a:bodyPr wrap="square" lIns="0" tIns="0" rIns="0" bIns="0" rtlCol="0" anchor="ctr"/>
           <a:lstStyle/>
           <a:p>
-            <a:pPr indent="0" marL="0">
+            <a:pPr marL="0" indent="0">
               <a:buNone/>
             </a:pPr>
             <a:r>
@@ -13750,7 +13730,7 @@
           <a:bodyPr wrap="square" lIns="0" tIns="0" rIns="0" bIns="0" rtlCol="0" anchor="ctr"/>
           <a:lstStyle/>
           <a:p>
-            <a:pPr indent="0" marL="0">
+            <a:pPr marL="0" indent="0">
               <a:buNone/>
             </a:pPr>
             <a:r>
@@ -13814,7 +13794,7 @@
           <a:bodyPr wrap="square" lIns="0" tIns="0" rIns="0" bIns="0" rtlCol="0" anchor="ctr"/>
           <a:lstStyle/>
           <a:p>
-            <a:pPr algn="ctr" indent="0" marL="0">
+            <a:pPr marL="0" indent="0" algn="ctr">
               <a:buNone/>
             </a:pPr>
             <a:r>
@@ -13848,6 +13828,7 @@
         <a:solidFill>
           <a:srgbClr val="0F172A"/>
         </a:solidFill>
+        <a:effectLst/>
       </p:bgPr>
     </p:bg>
     <p:spTree>
@@ -13939,11 +13920,11 @@
           <a:bodyPr wrap="square" lIns="0" tIns="0" rIns="0" bIns="0" rtlCol="0" anchor="ctr"/>
           <a:lstStyle/>
           <a:p>
-            <a:pPr indent="0" marL="0">
-              <a:buNone/>
-            </a:pPr>
-            <a:r>
-              <a:rPr lang="en-US" sz="1200" b="1" spc="400" kern="0" dirty="0">
+            <a:pPr marL="0" indent="0">
+              <a:buNone/>
+            </a:pPr>
+            <a:r>
+              <a:rPr lang="en-US" sz="1200" b="1" kern="0" spc="400" dirty="0">
                 <a:solidFill>
                   <a:srgbClr val="326CE5"/>
                 </a:solidFill>
@@ -13978,7 +13959,7 @@
           <a:bodyPr wrap="square" lIns="0" tIns="0" rIns="0" bIns="0" rtlCol="0" anchor="ctr"/>
           <a:lstStyle/>
           <a:p>
-            <a:pPr indent="0" marL="0">
+            <a:pPr marL="0" indent="0">
               <a:buNone/>
             </a:pPr>
             <a:r>
@@ -14017,7 +13998,7 @@
           <a:bodyPr wrap="square" lIns="0" tIns="0" rIns="0" bIns="0" rtlCol="0" anchor="ctr"/>
           <a:lstStyle/>
           <a:p>
-            <a:pPr indent="0" marL="0">
+            <a:pPr marL="0" indent="0">
               <a:buNone/>
             </a:pPr>
             <a:r>
@@ -14336,4 +14317,299 @@
     </a:ext>
   </a:extLst>
 </a:theme>
+</file>
+
+<file path=ppt/theme/theme2.xml><?xml version="1.0" encoding="utf-8"?>
+<a:theme xmlns:a="http://schemas.openxmlformats.org/drawingml/2006/main" name="Office Theme">
+  <a:themeElements>
+    <a:clrScheme name="Office">
+      <a:dk1>
+        <a:sysClr val="windowText" lastClr="000000"/>
+      </a:dk1>
+      <a:lt1>
+        <a:sysClr val="window" lastClr="FFFFFF"/>
+      </a:lt1>
+      <a:dk2>
+        <a:srgbClr val="44546A"/>
+      </a:dk2>
+      <a:lt2>
+        <a:srgbClr val="E7E6E6"/>
+      </a:lt2>
+      <a:accent1>
+        <a:srgbClr val="4472C4"/>
+      </a:accent1>
+      <a:accent2>
+        <a:srgbClr val="ED7D31"/>
+      </a:accent2>
+      <a:accent3>
+        <a:srgbClr val="A5A5A5"/>
+      </a:accent3>
+      <a:accent4>
+        <a:srgbClr val="FFC000"/>
+      </a:accent4>
+      <a:accent5>
+        <a:srgbClr val="5B9BD5"/>
+      </a:accent5>
+      <a:accent6>
+        <a:srgbClr val="70AD47"/>
+      </a:accent6>
+      <a:hlink>
+        <a:srgbClr val="0563C1"/>
+      </a:hlink>
+      <a:folHlink>
+        <a:srgbClr val="954F72"/>
+      </a:folHlink>
+    </a:clrScheme>
+    <a:fontScheme name="Office">
+      <a:majorFont>
+        <a:latin typeface="Calibri Light" panose="020F0302020204030204"/>
+        <a:ea typeface=""/>
+        <a:cs typeface=""/>
+        <a:font script="Jpan" typeface="游ゴシック Light"/>
+        <a:font script="Hang" typeface="맑은 고딕"/>
+        <a:font script="Hans" typeface="等线 Light"/>
+        <a:font script="Hant" typeface="新細明體"/>
+        <a:font script="Arab" typeface="Times New Roman"/>
+        <a:font script="Hebr" typeface="Times New Roman"/>
+        <a:font script="Thai" typeface="Angsana New"/>
+        <a:font script="Ethi" typeface="Nyala"/>
+        <a:font script="Beng" typeface="Vrinda"/>
+        <a:font script="Gujr" typeface="Shruti"/>
+        <a:font script="Khmr" typeface="MoolBoran"/>
+        <a:font script="Knda" typeface="Tunga"/>
+        <a:font script="Guru" typeface="Raavi"/>
+        <a:font script="Cans" typeface="Euphemia"/>
+        <a:font script="Cher" typeface="Plantagenet Cherokee"/>
+        <a:font script="Yiii" typeface="Microsoft Yi Baiti"/>
+        <a:font script="Tibt" typeface="Microsoft Himalaya"/>
+        <a:font script="Thaa" typeface="MV Boli"/>
+        <a:font script="Deva" typeface="Mangal"/>
+        <a:font script="Telu" typeface="Gautami"/>
+        <a:font script="Taml" typeface="Latha"/>
+        <a:font script="Syrc" typeface="Estrangelo Edessa"/>
+        <a:font script="Orya" typeface="Kalinga"/>
+        <a:font script="Mlym" typeface="Kartika"/>
+        <a:font script="Laoo" typeface="DokChampa"/>
+        <a:font script="Sinh" typeface="Iskoola Pota"/>
+        <a:font script="Mong" typeface="Mongolian Baiti"/>
+        <a:font script="Viet" typeface="Times New Roman"/>
+        <a:font script="Uigh" typeface="Microsoft Uighur"/>
+        <a:font script="Geor" typeface="Sylfaen"/>
+        <a:font script="Armn" typeface="Arial"/>
+        <a:font script="Bugi" typeface="Leelawadee UI"/>
+        <a:font script="Bopo" typeface="Microsoft JhengHei"/>
+        <a:font script="Java" typeface="Javanese Text"/>
+        <a:font script="Lisu" typeface="Segoe UI"/>
+        <a:font script="Mymr" typeface="Myanmar Text"/>
+        <a:font script="Nkoo" typeface="Ebrima"/>
+        <a:font script="Olck" typeface="Nirmala UI"/>
+        <a:font script="Osma" typeface="Ebrima"/>
+        <a:font script="Phag" typeface="Phagspa"/>
+        <a:font script="Syrn" typeface="Estrangelo Edessa"/>
+        <a:font script="Syrj" typeface="Estrangelo Edessa"/>
+        <a:font script="Syre" typeface="Estrangelo Edessa"/>
+        <a:font script="Sora" typeface="Nirmala UI"/>
+        <a:font script="Tale" typeface="Microsoft Tai Le"/>
+        <a:font script="Talu" typeface="Microsoft New Tai Lue"/>
+        <a:font script="Tfng" typeface="Ebrima"/>
+      </a:majorFont>
+      <a:minorFont>
+        <a:latin typeface="Calibri" panose="020F0502020204030204"/>
+        <a:ea typeface=""/>
+        <a:cs typeface=""/>
+        <a:font script="Jpan" typeface="游ゴシック"/>
+        <a:font script="Hang" typeface="맑은 고딕"/>
+        <a:font script="Hans" typeface="等线"/>
+        <a:font script="Hant" typeface="新細明體"/>
+        <a:font script="Arab" typeface="Arial"/>
+        <a:font script="Hebr" typeface="Arial"/>
+        <a:font script="Thai" typeface="Cordia New"/>
+        <a:font script="Ethi" typeface="Nyala"/>
+        <a:font script="Beng" typeface="Vrinda"/>
+        <a:font script="Gujr" typeface="Shruti"/>
+        <a:font script="Khmr" typeface="DaunPenh"/>
+        <a:font script="Knda" typeface="Tunga"/>
+        <a:font script="Guru" typeface="Raavi"/>
+        <a:font script="Cans" typeface="Euphemia"/>
+        <a:font script="Cher" typeface="Plantagenet Cherokee"/>
+        <a:font script="Yiii" typeface="Microsoft Yi Baiti"/>
+        <a:font script="Tibt" typeface="Microsoft Himalaya"/>
+        <a:font script="Thaa" typeface="MV Boli"/>
+        <a:font script="Deva" typeface="Mangal"/>
+        <a:font script="Telu" typeface="Gautami"/>
+        <a:font script="Taml" typeface="Latha"/>
+        <a:font script="Syrc" typeface="Estrangelo Edessa"/>
+        <a:font script="Orya" typeface="Kalinga"/>
+        <a:font script="Mlym" typeface="Kartika"/>
+        <a:font script="Laoo" typeface="DokChampa"/>
+        <a:font script="Sinh" typeface="Iskoola Pota"/>
+        <a:font script="Mong" typeface="Mongolian Baiti"/>
+        <a:font script="Viet" typeface="Arial"/>
+        <a:font script="Uigh" typeface="Microsoft Uighur"/>
+        <a:font script="Geor" typeface="Sylfaen"/>
+        <a:font script="Armn" typeface="Arial"/>
+        <a:font script="Bugi" typeface="Leelawadee UI"/>
+        <a:font script="Bopo" typeface="Microsoft JhengHei"/>
+        <a:font script="Java" typeface="Javanese Text"/>
+        <a:font script="Lisu" typeface="Segoe UI"/>
+        <a:font script="Mymr" typeface="Myanmar Text"/>
+        <a:font script="Nkoo" typeface="Ebrima"/>
+        <a:font script="Olck" typeface="Nirmala UI"/>
+        <a:font script="Osma" typeface="Ebrima"/>
+        <a:font script="Phag" typeface="Phagspa"/>
+        <a:font script="Syrn" typeface="Estrangelo Edessa"/>
+        <a:font script="Syrj" typeface="Estrangelo Edessa"/>
+        <a:font script="Syre" typeface="Estrangelo Edessa"/>
+        <a:font script="Sora" typeface="Nirmala UI"/>
+        <a:font script="Tale" typeface="Microsoft Tai Le"/>
+        <a:font script="Talu" typeface="Microsoft New Tai Lue"/>
+        <a:font script="Tfng" typeface="Ebrima"/>
+      </a:minorFont>
+    </a:fontScheme>
+    <a:fmtScheme name="Office">
+      <a:fillStyleLst>
+        <a:solidFill>
+          <a:schemeClr val="phClr"/>
+        </a:solidFill>
+        <a:gradFill rotWithShape="1">
+          <a:gsLst>
+            <a:gs pos="0">
+              <a:schemeClr val="phClr">
+                <a:lumMod val="110000"/>
+                <a:satMod val="105000"/>
+                <a:tint val="67000"/>
+              </a:schemeClr>
+            </a:gs>
+            <a:gs pos="50000">
+              <a:schemeClr val="phClr">
+                <a:lumMod val="105000"/>
+                <a:satMod val="103000"/>
+                <a:tint val="73000"/>
+              </a:schemeClr>
+            </a:gs>
+            <a:gs pos="100000">
+              <a:schemeClr val="phClr">
+                <a:lumMod val="105000"/>
+                <a:satMod val="109000"/>
+                <a:tint val="81000"/>
+              </a:schemeClr>
+            </a:gs>
+          </a:gsLst>
+          <a:lin ang="5400000" scaled="0"/>
+        </a:gradFill>
+        <a:gradFill rotWithShape="1">
+          <a:gsLst>
+            <a:gs pos="0">
+              <a:schemeClr val="phClr">
+                <a:satMod val="103000"/>
+                <a:lumMod val="102000"/>
+                <a:tint val="94000"/>
+              </a:schemeClr>
+            </a:gs>
+            <a:gs pos="50000">
+              <a:schemeClr val="phClr">
+                <a:satMod val="110000"/>
+                <a:lumMod val="100000"/>
+                <a:shade val="100000"/>
+              </a:schemeClr>
+            </a:gs>
+            <a:gs pos="100000">
+              <a:schemeClr val="phClr">
+                <a:lumMod val="99000"/>
+                <a:satMod val="120000"/>
+                <a:shade val="78000"/>
+              </a:schemeClr>
+            </a:gs>
+          </a:gsLst>
+          <a:lin ang="5400000" scaled="0"/>
+        </a:gradFill>
+      </a:fillStyleLst>
+      <a:lnStyleLst>
+        <a:ln w="6350" cap="flat" cmpd="sng" algn="ctr">
+          <a:solidFill>
+            <a:schemeClr val="phClr"/>
+          </a:solidFill>
+          <a:prstDash val="solid"/>
+          <a:miter lim="800000"/>
+        </a:ln>
+        <a:ln w="12700" cap="flat" cmpd="sng" algn="ctr">
+          <a:solidFill>
+            <a:schemeClr val="phClr"/>
+          </a:solidFill>
+          <a:prstDash val="solid"/>
+          <a:miter lim="800000"/>
+        </a:ln>
+        <a:ln w="19050" cap="flat" cmpd="sng" algn="ctr">
+          <a:solidFill>
+            <a:schemeClr val="phClr"/>
+          </a:solidFill>
+          <a:prstDash val="solid"/>
+          <a:miter lim="800000"/>
+        </a:ln>
+      </a:lnStyleLst>
+      <a:effectStyleLst>
+        <a:effectStyle>
+          <a:effectLst/>
+        </a:effectStyle>
+        <a:effectStyle>
+          <a:effectLst/>
+        </a:effectStyle>
+        <a:effectStyle>
+          <a:effectLst>
+            <a:outerShdw blurRad="57150" dist="19050" dir="5400000" algn="ctr" rotWithShape="0">
+              <a:srgbClr val="000000">
+                <a:alpha val="63000"/>
+              </a:srgbClr>
+            </a:outerShdw>
+          </a:effectLst>
+        </a:effectStyle>
+      </a:effectStyleLst>
+      <a:bgFillStyleLst>
+        <a:solidFill>
+          <a:schemeClr val="phClr"/>
+        </a:solidFill>
+        <a:solidFill>
+          <a:schemeClr val="phClr">
+            <a:tint val="95000"/>
+            <a:satMod val="170000"/>
+          </a:schemeClr>
+        </a:solidFill>
+        <a:gradFill rotWithShape="1">
+          <a:gsLst>
+            <a:gs pos="0">
+              <a:schemeClr val="phClr">
+                <a:tint val="93000"/>
+                <a:satMod val="150000"/>
+                <a:shade val="98000"/>
+                <a:lumMod val="102000"/>
+              </a:schemeClr>
+            </a:gs>
+            <a:gs pos="50000">
+              <a:schemeClr val="phClr">
+                <a:tint val="98000"/>
+                <a:satMod val="130000"/>
+                <a:shade val="90000"/>
+                <a:lumMod val="103000"/>
+              </a:schemeClr>
+            </a:gs>
+            <a:gs pos="100000">
+              <a:schemeClr val="phClr">
+                <a:shade val="63000"/>
+                <a:satMod val="120000"/>
+              </a:schemeClr>
+            </a:gs>
+          </a:gsLst>
+          <a:lin ang="5400000" scaled="0"/>
+        </a:gradFill>
+      </a:bgFillStyleLst>
+    </a:fmtScheme>
+  </a:themeElements>
+  <a:objectDefaults/>
+  <a:extraClrSchemeLst/>
+  <a:extLst>
+    <a:ext uri="{05A4C25C-085E-4340-85A3-A5531E510DB2}">
+      <thm15:themeFamily xmlns:thm15="http://schemas.microsoft.com/office/thememl/2012/main" name="Office Theme" id="{62F939B6-93AF-4DB8-9C6B-D6C7DFDC589F}" vid="{4A3C46E8-61CC-4603-A589-7422A47A8E4A}"/>
+    </a:ext>
+  </a:extLst>
+</a:theme>
 </file>